--- a/docs/assets/Leibniz-KERT-Architecture-Native.pptx
+++ b/docs/assets/Leibniz-KERT-Architecture-Native.pptx
@@ -1116,3755 +1116,6 @@
     </p:otherStyle>
   </p:txStyles>
 </p:sldMaster>
-</file>
-
-<file path=ppt/slides/slide1.xml><?xml version="1.0" encoding="utf-8"?>
-<p:sld xmlns:a="http://schemas.openxmlformats.org/drawingml/2006/main" xmlns:r="http://schemas.openxmlformats.org/officeDocument/2006/relationships" xmlns:p="http://schemas.openxmlformats.org/presentationml/2006/main">
-  <p:cSld name="Slide 1">
-    <p:bg>
-      <p:bgPr>
-        <a:solidFill>
-          <a:srgbClr val="2D3142"/>
-        </a:solidFill>
-      </p:bgPr>
-    </p:bg>
-    <p:spTree>
-      <p:nvGrpSpPr>
-        <p:cNvPr id="1" name=""/>
-        <p:cNvGrpSpPr/>
-        <p:nvPr/>
-      </p:nvGrpSpPr>
-      <p:grpSpPr>
-        <a:xfrm>
-          <a:off x="0" y="0"/>
-          <a:ext cx="0" cy="0"/>
-          <a:chOff x="0" y="0"/>
-          <a:chExt cx="0" cy="0"/>
-        </a:xfrm>
-      </p:grpSpPr>
-      <p:sp>
-        <p:nvSpPr>
-          <p:cNvPr id="2" name="Shape 0"/>
-          <p:cNvSpPr/>
-          <p:nvPr/>
-        </p:nvSpPr>
-        <p:spPr>
-          <a:xfrm>
-            <a:off x="0" y="2560320"/>
-            <a:ext cx="12191695" cy="27432"/>
-          </a:xfrm>
-          <a:prstGeom prst="RECTANGLE">
-            <a:avLst/>
-          </a:prstGeom>
-          <a:solidFill>
-            <a:srgbClr val="EB6C36"/>
-          </a:solidFill>
-          <a:ln w="12700">
-            <a:solidFill>
-              <a:srgbClr val="333333"/>
-            </a:solidFill>
-            <a:prstDash val="solid"/>
-          </a:ln>
-        </p:spPr>
-      </p:sp>
-      <p:sp>
-        <p:nvSpPr>
-          <p:cNvPr id="3" name="Text 1"/>
-          <p:cNvSpPr/>
-          <p:nvPr/>
-        </p:nvSpPr>
-        <p:spPr>
-          <a:xfrm>
-            <a:off x="731520" y="1097280"/>
-            <a:ext cx="10698480" cy="1097280"/>
-          </a:xfrm>
-          <a:prstGeom prst="rect">
-            <a:avLst/>
-          </a:prstGeom>
-          <a:noFill/>
-          <a:ln/>
-        </p:spPr>
-        <p:txBody>
-          <a:bodyPr wrap="square" rtlCol="0" anchor="ctr"/>
-          <a:lstStyle/>
-          <a:p>
-            <a:pPr algn="l" indent="0" marL="0">
-              <a:buNone/>
-            </a:pPr>
-            <a:r>
-              <a:rPr lang="en-US" sz="4200" dirty="0">
-                <a:solidFill>
-                  <a:srgbClr val="FFFFFF"/>
-                </a:solidFill>
-                <a:latin typeface="Georgia" pitchFamily="34" charset="0"/>
-                <a:ea typeface="Georgia" pitchFamily="34" charset="-122"/>
-                <a:cs typeface="Georgia" pitchFamily="34" charset="-120"/>
-              </a:rPr>
-              <a:t>Leibniz-KERT</a:t>
-            </a:r>
-            <a:endParaRPr lang="en-US" sz="4200" dirty="0"/>
-          </a:p>
-        </p:txBody>
-      </p:sp>
-      <p:sp>
-        <p:nvSpPr>
-          <p:cNvPr id="4" name="Text 2"/>
-          <p:cNvSpPr/>
-          <p:nvPr/>
-        </p:nvSpPr>
-        <p:spPr>
-          <a:xfrm>
-            <a:off x="731520" y="2834640"/>
-            <a:ext cx="10698480" cy="548640"/>
-          </a:xfrm>
-          <a:prstGeom prst="rect">
-            <a:avLst/>
-          </a:prstGeom>
-          <a:noFill/>
-          <a:ln/>
-        </p:spPr>
-        <p:txBody>
-          <a:bodyPr wrap="square" rtlCol="0" anchor="ctr"/>
-          <a:lstStyle/>
-          <a:p>
-            <a:pPr algn="l" indent="0" marL="0">
-              <a:buNone/>
-            </a:pPr>
-            <a:r>
-              <a:rPr lang="en-US" sz="1600" dirty="0">
-                <a:solidFill>
-                  <a:srgbClr val="EB6C36"/>
-                </a:solidFill>
-                <a:latin typeface="Microsoft YaHei" pitchFamily="34" charset="0"/>
-                <a:ea typeface="Microsoft YaHei" pitchFamily="34" charset="-122"/>
-                <a:cs typeface="Microsoft YaHei" pitchFamily="34" charset="-120"/>
-              </a:rPr>
-              <a:t>DKWS 独立知识工程服务端 · C′ 混合架构</a:t>
-            </a:r>
-            <a:endParaRPr lang="en-US" sz="1600" dirty="0"/>
-          </a:p>
-        </p:txBody>
-      </p:sp>
-      <p:sp>
-        <p:nvSpPr>
-          <p:cNvPr id="5" name="Text 3"/>
-          <p:cNvSpPr/>
-          <p:nvPr/>
-        </p:nvSpPr>
-        <p:spPr>
-          <a:xfrm>
-            <a:off x="731520" y="3474720"/>
-            <a:ext cx="10698480" cy="457200"/>
-          </a:xfrm>
-          <a:prstGeom prst="rect">
-            <a:avLst/>
-          </a:prstGeom>
-          <a:noFill/>
-          <a:ln/>
-        </p:spPr>
-        <p:txBody>
-          <a:bodyPr wrap="square" rtlCol="0" anchor="ctr"/>
-          <a:lstStyle/>
-          <a:p>
-            <a:pPr algn="l" indent="0" marL="0">
-              <a:buNone/>
-            </a:pPr>
-            <a:r>
-              <a:rPr lang="en-US" sz="1300" dirty="0">
-                <a:solidFill>
-                  <a:srgbClr val="7A8399"/>
-                </a:solidFill>
-                <a:latin typeface="Microsoft YaHei" pitchFamily="34" charset="0"/>
-                <a:ea typeface="Microsoft YaHei" pitchFamily="34" charset="-122"/>
-                <a:cs typeface="Microsoft YaHei" pitchFamily="34" charset="-120"/>
-              </a:rPr>
-              <a:t>知识架构 · 功能布局 · 技术栈</a:t>
-            </a:r>
-            <a:endParaRPr lang="en-US" sz="1300" dirty="0"/>
-          </a:p>
-        </p:txBody>
-      </p:sp>
-      <p:sp>
-        <p:nvSpPr>
-          <p:cNvPr id="6" name="Text 4"/>
-          <p:cNvSpPr/>
-          <p:nvPr/>
-        </p:nvSpPr>
-        <p:spPr>
-          <a:xfrm>
-            <a:off x="731520" y="5943600"/>
-            <a:ext cx="10698480" cy="365760"/>
-          </a:xfrm>
-          <a:prstGeom prst="rect">
-            <a:avLst/>
-          </a:prstGeom>
-          <a:noFill/>
-          <a:ln/>
-        </p:spPr>
-        <p:txBody>
-          <a:bodyPr wrap="square" rtlCol="0" anchor="ctr"/>
-          <a:lstStyle/>
-          <a:p>
-            <a:pPr algn="l" indent="0" marL="0">
-              <a:buNone/>
-            </a:pPr>
-            <a:r>
-              <a:rPr lang="en-US" sz="1000" dirty="0">
-                <a:solidFill>
-                  <a:srgbClr val="4F5D75"/>
-                </a:solidFill>
-                <a:latin typeface="Consolas" pitchFamily="34" charset="0"/>
-                <a:ea typeface="Consolas" pitchFamily="34" charset="-122"/>
-                <a:cs typeface="Consolas" pitchFamily="34" charset="-120"/>
-              </a:rPr>
-              <a:t>Architecture Overview · 2026</a:t>
-            </a:r>
-            <a:endParaRPr lang="en-US" sz="1000" dirty="0"/>
-          </a:p>
-        </p:txBody>
-      </p:sp>
-    </p:spTree>
-  </p:cSld>
-  <p:clrMapOvr>
-    <a:masterClrMapping/>
-  </p:clrMapOvr>
-</p:sld>
-</file>
-
-<file path=ppt/slides/slide2.xml><?xml version="1.0" encoding="utf-8"?>
-<p:sld xmlns:a="http://schemas.openxmlformats.org/drawingml/2006/main" xmlns:r="http://schemas.openxmlformats.org/officeDocument/2006/relationships" xmlns:p="http://schemas.openxmlformats.org/presentationml/2006/main">
-  <p:cSld name="Slide 2">
-    <p:bg>
-      <p:bgPr>
-        <a:solidFill>
-          <a:srgbClr val="F5F5F5"/>
-        </a:solidFill>
-      </p:bgPr>
-    </p:bg>
-    <p:spTree>
-      <p:nvGrpSpPr>
-        <p:cNvPr id="1" name=""/>
-        <p:cNvGrpSpPr/>
-        <p:nvPr/>
-      </p:nvGrpSpPr>
-      <p:grpSpPr>
-        <a:xfrm>
-          <a:off x="0" y="0"/>
-          <a:ext cx="0" cy="0"/>
-          <a:chOff x="0" y="0"/>
-          <a:chExt cx="0" cy="0"/>
-        </a:xfrm>
-      </p:grpSpPr>
-      <p:sp>
-        <p:nvSpPr>
-          <p:cNvPr id="2" name="Text 0"/>
-          <p:cNvSpPr/>
-          <p:nvPr/>
-        </p:nvSpPr>
-        <p:spPr>
-          <a:xfrm>
-            <a:off x="228600" y="27432"/>
-            <a:ext cx="11704320" cy="320040"/>
-          </a:xfrm>
-          <a:prstGeom prst="rect">
-            <a:avLst/>
-          </a:prstGeom>
-          <a:noFill/>
-          <a:ln/>
-        </p:spPr>
-        <p:txBody>
-          <a:bodyPr wrap="square" rtlCol="0" anchor="ctr"/>
-          <a:lstStyle/>
-          <a:p>
-            <a:pPr algn="l" indent="0" marL="0">
-              <a:buNone/>
-            </a:pPr>
-            <a:r>
-              <a:rPr lang="en-US" sz="1400" b="1" dirty="0">
-                <a:solidFill>
-                  <a:srgbClr val="2D3142"/>
-                </a:solidFill>
-                <a:latin typeface="Microsoft YaHei" pitchFamily="34" charset="0"/>
-                <a:ea typeface="Microsoft YaHei" pitchFamily="34" charset="-122"/>
-                <a:cs typeface="Microsoft YaHei" pitchFamily="34" charset="-120"/>
-              </a:rPr>
-              <a:t>DKWS 知识架构</a:t>
-            </a:r>
-            <a:endParaRPr lang="en-US" sz="1400" dirty="0"/>
-          </a:p>
-        </p:txBody>
-      </p:sp>
-      <p:sp>
-        <p:nvSpPr>
-          <p:cNvPr id="3" name="Shape 1"/>
-          <p:cNvSpPr/>
-          <p:nvPr/>
-        </p:nvSpPr>
-        <p:spPr>
-          <a:xfrm>
-            <a:off x="1471214" y="265622"/>
-            <a:ext cx="9249268" cy="610195"/>
-          </a:xfrm>
-          <a:prstGeom prst="ROUNDED_RECTANGLE">
-            <a:avLst>
-              <a:gd name="adj" fmla="val 8991"/>
-            </a:avLst>
-          </a:prstGeom>
-          <a:solidFill>
-            <a:srgbClr val="ECECEC"/>
-          </a:solidFill>
-          <a:ln w="5080">
-            <a:solidFill>
-              <a:srgbClr val="4F5D75"/>
-            </a:solidFill>
-            <a:prstDash val="solid"/>
-          </a:ln>
-        </p:spPr>
-      </p:sp>
-      <p:sp>
-        <p:nvSpPr>
-          <p:cNvPr id="4" name="Text 2"/>
-          <p:cNvSpPr/>
-          <p:nvPr/>
-        </p:nvSpPr>
-        <p:spPr>
-          <a:xfrm>
-            <a:off x="6095848" y="265622"/>
-            <a:ext cx="9249268" cy="80289"/>
-          </a:xfrm>
-          <a:prstGeom prst="rect">
-            <a:avLst/>
-          </a:prstGeom>
-          <a:noFill/>
-          <a:ln/>
-        </p:spPr>
-        <p:txBody>
-          <a:bodyPr wrap="square" lIns="0" tIns="0" rIns="0" bIns="0" rtlCol="0" anchor="ctr"/>
-          <a:lstStyle/>
-          <a:p>
-            <a:pPr algn="ctr" indent="0" marL="0">
-              <a:buNone/>
-            </a:pPr>
-            <a:r>
-              <a:rPr lang="en-US" sz="500" dirty="0">
-                <a:solidFill>
-                  <a:srgbClr val="7A8399"/>
-                </a:solidFill>
-                <a:latin typeface="Consolas" pitchFamily="34" charset="0"/>
-                <a:ea typeface="Consolas" pitchFamily="34" charset="-122"/>
-                <a:cs typeface="Consolas" pitchFamily="34" charset="-120"/>
-              </a:rPr>
-              <a:t>CONSUMERS</a:t>
-            </a:r>
-            <a:endParaRPr lang="en-US" sz="500" dirty="0"/>
-          </a:p>
-        </p:txBody>
-      </p:sp>
-      <p:sp>
-        <p:nvSpPr>
-          <p:cNvPr id="5" name="Shape 3"/>
-          <p:cNvSpPr/>
-          <p:nvPr/>
-        </p:nvSpPr>
-        <p:spPr>
-          <a:xfrm>
-            <a:off x="1599676" y="426200"/>
-            <a:ext cx="1364909" cy="353271"/>
-          </a:xfrm>
-          <a:prstGeom prst="ROUNDED_RECTANGLE">
-            <a:avLst>
-              <a:gd name="adj" fmla="val 10354"/>
-            </a:avLst>
-          </a:prstGeom>
-          <a:solidFill>
-            <a:srgbClr val="EAF0FA"/>
-          </a:solidFill>
-          <a:ln w="6350">
-            <a:solidFill>
-              <a:srgbClr val="2E5AA8"/>
-            </a:solidFill>
-            <a:prstDash val="solid"/>
-          </a:ln>
-        </p:spPr>
-      </p:sp>
-      <p:sp>
-        <p:nvSpPr>
-          <p:cNvPr id="6" name="Text 4"/>
-          <p:cNvSpPr/>
-          <p:nvPr/>
-        </p:nvSpPr>
-        <p:spPr>
-          <a:xfrm>
-            <a:off x="1599676" y="426200"/>
-            <a:ext cx="1364909" cy="192693"/>
-          </a:xfrm>
-          <a:prstGeom prst="rect">
-            <a:avLst/>
-          </a:prstGeom>
-          <a:noFill/>
-          <a:ln/>
-        </p:spPr>
-        <p:txBody>
-          <a:bodyPr wrap="square" lIns="0" tIns="0" rIns="0" bIns="0" rtlCol="0" anchor="ctr"/>
-          <a:lstStyle/>
-          <a:p>
-            <a:pPr algn="ctr" indent="0" marL="0">
-              <a:buNone/>
-            </a:pPr>
-            <a:r>
-              <a:rPr lang="en-US" sz="700" b="1" dirty="0">
-                <a:solidFill>
-                  <a:srgbClr val="2D3142"/>
-                </a:solidFill>
-                <a:latin typeface="Microsoft YaHei" pitchFamily="34" charset="0"/>
-                <a:ea typeface="Microsoft YaHei" pitchFamily="34" charset="-122"/>
-                <a:cs typeface="Microsoft YaHei" pitchFamily="34" charset="-120"/>
-              </a:rPr>
-              <a:t>GITS 工作台</a:t>
-            </a:r>
-            <a:endParaRPr lang="en-US" sz="700" dirty="0"/>
-          </a:p>
-        </p:txBody>
-      </p:sp>
-      <p:sp>
-        <p:nvSpPr>
-          <p:cNvPr id="7" name="Text 5"/>
-          <p:cNvSpPr/>
-          <p:nvPr/>
-        </p:nvSpPr>
-        <p:spPr>
-          <a:xfrm>
-            <a:off x="1599676" y="618893"/>
-            <a:ext cx="1364909" cy="160578"/>
-          </a:xfrm>
-          <a:prstGeom prst="rect">
-            <a:avLst/>
-          </a:prstGeom>
-          <a:noFill/>
-          <a:ln/>
-        </p:spPr>
-        <p:txBody>
-          <a:bodyPr wrap="square" lIns="0" tIns="0" rIns="0" bIns="0" rtlCol="0" anchor="ctr"/>
-          <a:lstStyle/>
-          <a:p>
-            <a:pPr algn="ctr" indent="0" marL="0">
-              <a:buNone/>
-            </a:pPr>
-            <a:r>
-              <a:rPr lang="en-US" sz="550" dirty="0">
-                <a:solidFill>
-                  <a:srgbClr val="4F5D75"/>
-                </a:solidFill>
-                <a:latin typeface="Consolas" pitchFamily="34" charset="0"/>
-                <a:ea typeface="Consolas" pitchFamily="34" charset="-122"/>
-                <a:cs typeface="Consolas" pitchFamily="34" charset="-120"/>
-              </a:rPr>
-              <a:t>execute v1.3</a:t>
-            </a:r>
-            <a:endParaRPr lang="en-US" sz="550" dirty="0"/>
-          </a:p>
-        </p:txBody>
-      </p:sp>
-      <p:sp>
-        <p:nvSpPr>
-          <p:cNvPr id="8" name="Shape 6"/>
-          <p:cNvSpPr/>
-          <p:nvPr/>
-        </p:nvSpPr>
-        <p:spPr>
-          <a:xfrm>
-            <a:off x="3141220" y="426200"/>
-            <a:ext cx="1124043" cy="353271"/>
-          </a:xfrm>
-          <a:prstGeom prst="ROUNDED_RECTANGLE">
-            <a:avLst>
-              <a:gd name="adj" fmla="val 10354"/>
-            </a:avLst>
-          </a:prstGeom>
-          <a:solidFill>
-            <a:srgbClr val="EAF0FA"/>
-          </a:solidFill>
-          <a:ln w="6350">
-            <a:solidFill>
-              <a:srgbClr val="2E5AA8"/>
-            </a:solidFill>
-            <a:prstDash val="solid"/>
-          </a:ln>
-        </p:spPr>
-      </p:sp>
-      <p:sp>
-        <p:nvSpPr>
-          <p:cNvPr id="9" name="Text 7"/>
-          <p:cNvSpPr/>
-          <p:nvPr/>
-        </p:nvSpPr>
-        <p:spPr>
-          <a:xfrm>
-            <a:off x="3141220" y="426200"/>
-            <a:ext cx="1124043" cy="192693"/>
-          </a:xfrm>
-          <a:prstGeom prst="rect">
-            <a:avLst/>
-          </a:prstGeom>
-          <a:noFill/>
-          <a:ln/>
-        </p:spPr>
-        <p:txBody>
-          <a:bodyPr wrap="square" lIns="0" tIns="0" rIns="0" bIns="0" rtlCol="0" anchor="ctr"/>
-          <a:lstStyle/>
-          <a:p>
-            <a:pPr algn="ctr" indent="0" marL="0">
-              <a:buNone/>
-            </a:pPr>
-            <a:r>
-              <a:rPr lang="en-US" sz="700" b="1" dirty="0">
-                <a:solidFill>
-                  <a:srgbClr val="2D3142"/>
-                </a:solidFill>
-                <a:latin typeface="Microsoft YaHei" pitchFamily="34" charset="0"/>
-                <a:ea typeface="Microsoft YaHei" pitchFamily="34" charset="-122"/>
-                <a:cs typeface="Microsoft YaHei" pitchFamily="34" charset="-120"/>
-              </a:rPr>
-              <a:t>DSH 知识面板</a:t>
-            </a:r>
-            <a:endParaRPr lang="en-US" sz="700" dirty="0"/>
-          </a:p>
-        </p:txBody>
-      </p:sp>
-      <p:sp>
-        <p:nvSpPr>
-          <p:cNvPr id="10" name="Shape 8"/>
-          <p:cNvSpPr/>
-          <p:nvPr/>
-        </p:nvSpPr>
-        <p:spPr>
-          <a:xfrm>
-            <a:off x="4441899" y="426200"/>
-            <a:ext cx="963465" cy="353271"/>
-          </a:xfrm>
-          <a:prstGeom prst="ROUNDED_RECTANGLE">
-            <a:avLst>
-              <a:gd name="adj" fmla="val 10354"/>
-            </a:avLst>
-          </a:prstGeom>
-          <a:solidFill>
-            <a:srgbClr val="F0F1F3"/>
-          </a:solidFill>
-          <a:ln w="6350">
-            <a:solidFill>
-              <a:srgbClr val="7A8399"/>
-            </a:solidFill>
-            <a:prstDash val="solid"/>
-          </a:ln>
-        </p:spPr>
-      </p:sp>
-      <p:sp>
-        <p:nvSpPr>
-          <p:cNvPr id="11" name="Text 9"/>
-          <p:cNvSpPr/>
-          <p:nvPr/>
-        </p:nvSpPr>
-        <p:spPr>
-          <a:xfrm>
-            <a:off x="4441899" y="426200"/>
-            <a:ext cx="963465" cy="192693"/>
-          </a:xfrm>
-          <a:prstGeom prst="rect">
-            <a:avLst/>
-          </a:prstGeom>
-          <a:noFill/>
-          <a:ln/>
-        </p:spPr>
-        <p:txBody>
-          <a:bodyPr wrap="square" lIns="0" tIns="0" rIns="0" bIns="0" rtlCol="0" anchor="ctr"/>
-          <a:lstStyle/>
-          <a:p>
-            <a:pPr algn="ctr" indent="0" marL="0">
-              <a:buNone/>
-            </a:pPr>
-            <a:r>
-              <a:rPr lang="en-US" sz="700" b="1" dirty="0">
-                <a:solidFill>
-                  <a:srgbClr val="2D3142"/>
-                </a:solidFill>
-                <a:latin typeface="Microsoft YaHei" pitchFamily="34" charset="0"/>
-                <a:ea typeface="Microsoft YaHei" pitchFamily="34" charset="-122"/>
-                <a:cs typeface="Microsoft YaHei" pitchFamily="34" charset="-120"/>
-              </a:rPr>
-              <a:t>CLI / 评测</a:t>
-            </a:r>
-            <a:endParaRPr lang="en-US" sz="700" dirty="0"/>
-          </a:p>
-        </p:txBody>
-      </p:sp>
-      <p:sp>
-        <p:nvSpPr>
-          <p:cNvPr id="12" name="Shape 10"/>
-          <p:cNvSpPr/>
-          <p:nvPr/>
-        </p:nvSpPr>
-        <p:spPr>
-          <a:xfrm>
-            <a:off x="1471214" y="1036394"/>
-            <a:ext cx="9249268" cy="706541"/>
-          </a:xfrm>
-          <a:prstGeom prst="ROUNDED_RECTANGLE">
-            <a:avLst>
-              <a:gd name="adj" fmla="val 7765"/>
-            </a:avLst>
-          </a:prstGeom>
-          <a:solidFill>
-            <a:srgbClr val="ECECEC"/>
-          </a:solidFill>
-          <a:ln w="5080">
-            <a:solidFill>
-              <a:srgbClr val="4F5D75"/>
-            </a:solidFill>
-            <a:prstDash val="solid"/>
-          </a:ln>
-        </p:spPr>
-      </p:sp>
-      <p:sp>
-        <p:nvSpPr>
-          <p:cNvPr id="13" name="Text 11"/>
-          <p:cNvSpPr/>
-          <p:nvPr/>
-        </p:nvSpPr>
-        <p:spPr>
-          <a:xfrm>
-            <a:off x="6095848" y="1036394"/>
-            <a:ext cx="9249268" cy="80289"/>
-          </a:xfrm>
-          <a:prstGeom prst="rect">
-            <a:avLst/>
-          </a:prstGeom>
-          <a:noFill/>
-          <a:ln/>
-        </p:spPr>
-        <p:txBody>
-          <a:bodyPr wrap="square" lIns="0" tIns="0" rIns="0" bIns="0" rtlCol="0" anchor="ctr"/>
-          <a:lstStyle/>
-          <a:p>
-            <a:pPr algn="ctr" indent="0" marL="0">
-              <a:buNone/>
-            </a:pPr>
-            <a:r>
-              <a:rPr lang="en-US" sz="500" dirty="0">
-                <a:solidFill>
-                  <a:srgbClr val="7A8399"/>
-                </a:solidFill>
-                <a:latin typeface="Consolas" pitchFamily="34" charset="0"/>
-                <a:ea typeface="Consolas" pitchFamily="34" charset="-122"/>
-                <a:cs typeface="Consolas" pitchFamily="34" charset="-120"/>
-              </a:rPr>
-              <a:t>RUNTIME SERVICE</a:t>
-            </a:r>
-            <a:endParaRPr lang="en-US" sz="500" dirty="0"/>
-          </a:p>
-        </p:txBody>
-      </p:sp>
-      <p:sp>
-        <p:nvSpPr>
-          <p:cNvPr id="14" name="Shape 12"/>
-          <p:cNvSpPr/>
-          <p:nvPr/>
-        </p:nvSpPr>
-        <p:spPr>
-          <a:xfrm>
-            <a:off x="1599676" y="1196972"/>
-            <a:ext cx="1525487" cy="449617"/>
-          </a:xfrm>
-          <a:prstGeom prst="ROUNDED_RECTANGLE">
-            <a:avLst>
-              <a:gd name="adj" fmla="val 8135"/>
-            </a:avLst>
-          </a:prstGeom>
-          <a:solidFill>
-            <a:srgbClr val="FDF0E8"/>
-          </a:solidFill>
-          <a:ln w="8890">
-            <a:solidFill>
-              <a:srgbClr val="EB6C36"/>
-            </a:solidFill>
-            <a:prstDash val="solid"/>
-          </a:ln>
-        </p:spPr>
-      </p:sp>
-      <p:sp>
-        <p:nvSpPr>
-          <p:cNvPr id="15" name="Text 13"/>
-          <p:cNvSpPr/>
-          <p:nvPr/>
-        </p:nvSpPr>
-        <p:spPr>
-          <a:xfrm>
-            <a:off x="1599676" y="1196972"/>
-            <a:ext cx="1525487" cy="240866"/>
-          </a:xfrm>
-          <a:prstGeom prst="rect">
-            <a:avLst/>
-          </a:prstGeom>
-          <a:noFill/>
-          <a:ln/>
-        </p:spPr>
-        <p:txBody>
-          <a:bodyPr wrap="square" lIns="0" tIns="0" rIns="0" bIns="0" rtlCol="0" anchor="ctr"/>
-          <a:lstStyle/>
-          <a:p>
-            <a:pPr algn="ctr" indent="0" marL="0">
-              <a:buNone/>
-            </a:pPr>
-            <a:r>
-              <a:rPr lang="en-US" sz="700" b="1" dirty="0">
-                <a:solidFill>
-                  <a:srgbClr val="2D3142"/>
-                </a:solidFill>
-                <a:latin typeface="Microsoft YaHei" pitchFamily="34" charset="0"/>
-                <a:ea typeface="Microsoft YaHei" pitchFamily="34" charset="-122"/>
-                <a:cs typeface="Microsoft YaHei" pitchFamily="34" charset="-120"/>
-              </a:rPr>
-              <a:t>SkillExecutionService</a:t>
-            </a:r>
-            <a:endParaRPr lang="en-US" sz="700" dirty="0"/>
-          </a:p>
-        </p:txBody>
-      </p:sp>
-      <p:sp>
-        <p:nvSpPr>
-          <p:cNvPr id="16" name="Text 14"/>
-          <p:cNvSpPr/>
-          <p:nvPr/>
-        </p:nvSpPr>
-        <p:spPr>
-          <a:xfrm>
-            <a:off x="1599676" y="1437838"/>
-            <a:ext cx="1525487" cy="208751"/>
-          </a:xfrm>
-          <a:prstGeom prst="rect">
-            <a:avLst/>
-          </a:prstGeom>
-          <a:noFill/>
-          <a:ln/>
-        </p:spPr>
-        <p:txBody>
-          <a:bodyPr wrap="square" lIns="0" tIns="0" rIns="0" bIns="0" rtlCol="0" anchor="ctr"/>
-          <a:lstStyle/>
-          <a:p>
-            <a:pPr algn="ctr" indent="0" marL="0">
-              <a:buNone/>
-            </a:pPr>
-            <a:r>
-              <a:rPr lang="en-US" sz="550" dirty="0">
-                <a:solidFill>
-                  <a:srgbClr val="4F5D75"/>
-                </a:solidFill>
-                <a:latin typeface="Consolas" pitchFamily="34" charset="0"/>
-                <a:ea typeface="Consolas" pitchFamily="34" charset="-122"/>
-                <a:cs typeface="Consolas" pitchFamily="34" charset="-120"/>
-              </a:rPr>
-              <a:t>幂等 · assemblyTrace</a:t>
-            </a:r>
-            <a:endParaRPr lang="en-US" sz="550" dirty="0"/>
-          </a:p>
-        </p:txBody>
-      </p:sp>
-      <p:sp>
-        <p:nvSpPr>
-          <p:cNvPr id="17" name="Shape 15"/>
-          <p:cNvSpPr/>
-          <p:nvPr/>
-        </p:nvSpPr>
-        <p:spPr>
-          <a:xfrm>
-            <a:off x="3301798" y="1196972"/>
-            <a:ext cx="1686064" cy="449617"/>
-          </a:xfrm>
-          <a:prstGeom prst="ROUNDED_RECTANGLE">
-            <a:avLst>
-              <a:gd name="adj" fmla="val 8135"/>
-            </a:avLst>
-          </a:prstGeom>
-          <a:solidFill>
-            <a:srgbClr val="FDF0E8"/>
-          </a:solidFill>
-          <a:ln w="8890">
-            <a:solidFill>
-              <a:srgbClr val="EB6C36"/>
-            </a:solidFill>
-            <a:prstDash val="solid"/>
-          </a:ln>
-        </p:spPr>
-      </p:sp>
-      <p:sp>
-        <p:nvSpPr>
-          <p:cNvPr id="18" name="Text 16"/>
-          <p:cNvSpPr/>
-          <p:nvPr/>
-        </p:nvSpPr>
-        <p:spPr>
-          <a:xfrm>
-            <a:off x="3301798" y="1196972"/>
-            <a:ext cx="1686064" cy="240866"/>
-          </a:xfrm>
-          <a:prstGeom prst="rect">
-            <a:avLst/>
-          </a:prstGeom>
-          <a:noFill/>
-          <a:ln/>
-        </p:spPr>
-        <p:txBody>
-          <a:bodyPr wrap="square" lIns="0" tIns="0" rIns="0" bIns="0" rtlCol="0" anchor="ctr"/>
-          <a:lstStyle/>
-          <a:p>
-            <a:pPr algn="ctr" indent="0" marL="0">
-              <a:buNone/>
-            </a:pPr>
-            <a:r>
-              <a:rPr lang="en-US" sz="700" b="1" dirty="0">
-                <a:solidFill>
-                  <a:srgbClr val="2D3142"/>
-                </a:solidFill>
-                <a:latin typeface="Microsoft YaHei" pitchFamily="34" charset="0"/>
-                <a:ea typeface="Microsoft YaHei" pitchFamily="34" charset="-122"/>
-                <a:cs typeface="Microsoft YaHei" pitchFamily="34" charset="-120"/>
-              </a:rPr>
-              <a:t>CustomerKnowledgeProvider</a:t>
-            </a:r>
-            <a:endParaRPr lang="en-US" sz="700" dirty="0"/>
-          </a:p>
-        </p:txBody>
-      </p:sp>
-      <p:sp>
-        <p:nvSpPr>
-          <p:cNvPr id="19" name="Text 17"/>
-          <p:cNvSpPr/>
-          <p:nvPr/>
-        </p:nvSpPr>
-        <p:spPr>
-          <a:xfrm>
-            <a:off x="3301798" y="1437838"/>
-            <a:ext cx="1686064" cy="208751"/>
-          </a:xfrm>
-          <a:prstGeom prst="rect">
-            <a:avLst/>
-          </a:prstGeom>
-          <a:noFill/>
-          <a:ln/>
-        </p:spPr>
-        <p:txBody>
-          <a:bodyPr wrap="square" lIns="0" tIns="0" rIns="0" bIns="0" rtlCol="0" anchor="ctr"/>
-          <a:lstStyle/>
-          <a:p>
-            <a:pPr algn="ctr" indent="0" marL="0">
-              <a:buNone/>
-            </a:pPr>
-            <a:r>
-              <a:rPr lang="en-US" sz="550" dirty="0">
-                <a:solidFill>
-                  <a:srgbClr val="4F5D75"/>
-                </a:solidFill>
-                <a:latin typeface="Consolas" pitchFamily="34" charset="0"/>
-                <a:ea typeface="Consolas" pitchFamily="34" charset="-122"/>
-                <a:cs typeface="Consolas" pitchFamily="34" charset="-120"/>
-              </a:rPr>
-              <a:t>ki_map · entity · supply_chain</a:t>
-            </a:r>
-            <a:endParaRPr lang="en-US" sz="550" dirty="0"/>
-          </a:p>
-        </p:txBody>
-      </p:sp>
-      <p:sp>
-        <p:nvSpPr>
-          <p:cNvPr id="20" name="Shape 18"/>
-          <p:cNvSpPr/>
-          <p:nvPr/>
-        </p:nvSpPr>
-        <p:spPr>
-          <a:xfrm>
-            <a:off x="5164498" y="1196972"/>
-            <a:ext cx="1364909" cy="449617"/>
-          </a:xfrm>
-          <a:prstGeom prst="ROUNDED_RECTANGLE">
-            <a:avLst>
-              <a:gd name="adj" fmla="val 8135"/>
-            </a:avLst>
-          </a:prstGeom>
-          <a:solidFill>
-            <a:srgbClr val="FFFFFF"/>
-          </a:solidFill>
-          <a:ln w="6350">
-            <a:solidFill>
-              <a:srgbClr val="2D3142"/>
-            </a:solidFill>
-            <a:prstDash val="solid"/>
-          </a:ln>
-        </p:spPr>
-      </p:sp>
-      <p:sp>
-        <p:nvSpPr>
-          <p:cNvPr id="21" name="Text 19"/>
-          <p:cNvSpPr/>
-          <p:nvPr/>
-        </p:nvSpPr>
-        <p:spPr>
-          <a:xfrm>
-            <a:off x="5164498" y="1196972"/>
-            <a:ext cx="1364909" cy="240866"/>
-          </a:xfrm>
-          <a:prstGeom prst="rect">
-            <a:avLst/>
-          </a:prstGeom>
-          <a:noFill/>
-          <a:ln/>
-        </p:spPr>
-        <p:txBody>
-          <a:bodyPr wrap="square" lIns="0" tIns="0" rIns="0" bIns="0" rtlCol="0" anchor="ctr"/>
-          <a:lstStyle/>
-          <a:p>
-            <a:pPr algn="ctr" indent="0" marL="0">
-              <a:buNone/>
-            </a:pPr>
-            <a:r>
-              <a:rPr lang="en-US" sz="700" b="1" dirty="0">
-                <a:solidFill>
-                  <a:srgbClr val="2D3142"/>
-                </a:solidFill>
-                <a:latin typeface="Microsoft YaHei" pitchFamily="34" charset="0"/>
-                <a:ea typeface="Microsoft YaHei" pitchFamily="34" charset="-122"/>
-                <a:cs typeface="Microsoft YaHei" pitchFamily="34" charset="-120"/>
-              </a:rPr>
-              <a:t>KnowledgeService</a:t>
-            </a:r>
-            <a:endParaRPr lang="en-US" sz="700" dirty="0"/>
-          </a:p>
-        </p:txBody>
-      </p:sp>
-      <p:sp>
-        <p:nvSpPr>
-          <p:cNvPr id="22" name="Text 20"/>
-          <p:cNvSpPr/>
-          <p:nvPr/>
-        </p:nvSpPr>
-        <p:spPr>
-          <a:xfrm>
-            <a:off x="5164498" y="1437838"/>
-            <a:ext cx="1364909" cy="208751"/>
-          </a:xfrm>
-          <a:prstGeom prst="rect">
-            <a:avLst/>
-          </a:prstGeom>
-          <a:noFill/>
-          <a:ln/>
-        </p:spPr>
-        <p:txBody>
-          <a:bodyPr wrap="square" lIns="0" tIns="0" rIns="0" bIns="0" rtlCol="0" anchor="ctr"/>
-          <a:lstStyle/>
-          <a:p>
-            <a:pPr algn="ctr" indent="0" marL="0">
-              <a:buNone/>
-            </a:pPr>
-            <a:r>
-              <a:rPr lang="en-US" sz="550" dirty="0">
-                <a:solidFill>
-                  <a:srgbClr val="4F5D75"/>
-                </a:solidFill>
-                <a:latin typeface="Consolas" pitchFamily="34" charset="0"/>
-                <a:ea typeface="Consolas" pitchFamily="34" charset="-122"/>
-                <a:cs typeface="Consolas" pitchFamily="34" charset="-120"/>
-              </a:rPr>
-              <a:t>search · graph · rule</a:t>
-            </a:r>
-            <a:endParaRPr lang="en-US" sz="550" dirty="0"/>
-          </a:p>
-        </p:txBody>
-      </p:sp>
-      <p:sp>
-        <p:nvSpPr>
-          <p:cNvPr id="23" name="Shape 21"/>
-          <p:cNvSpPr/>
-          <p:nvPr/>
-        </p:nvSpPr>
-        <p:spPr>
-          <a:xfrm>
-            <a:off x="6706042" y="1196972"/>
-            <a:ext cx="1124043" cy="449617"/>
-          </a:xfrm>
-          <a:prstGeom prst="ROUNDED_RECTANGLE">
-            <a:avLst>
-              <a:gd name="adj" fmla="val 8135"/>
-            </a:avLst>
-          </a:prstGeom>
-          <a:solidFill>
-            <a:srgbClr val="F0F1F3"/>
-          </a:solidFill>
-          <a:ln w="6350">
-            <a:solidFill>
-              <a:srgbClr val="4F5D75"/>
-            </a:solidFill>
-            <a:prstDash val="solid"/>
-          </a:ln>
-        </p:spPr>
-      </p:sp>
-      <p:sp>
-        <p:nvSpPr>
-          <p:cNvPr id="24" name="Text 22"/>
-          <p:cNvSpPr/>
-          <p:nvPr/>
-        </p:nvSpPr>
-        <p:spPr>
-          <a:xfrm>
-            <a:off x="6706042" y="1196972"/>
-            <a:ext cx="1124043" cy="240866"/>
-          </a:xfrm>
-          <a:prstGeom prst="rect">
-            <a:avLst/>
-          </a:prstGeom>
-          <a:noFill/>
-          <a:ln/>
-        </p:spPr>
-        <p:txBody>
-          <a:bodyPr wrap="square" lIns="0" tIns="0" rIns="0" bIns="0" rtlCol="0" anchor="ctr"/>
-          <a:lstStyle/>
-          <a:p>
-            <a:pPr algn="ctr" indent="0" marL="0">
-              <a:buNone/>
-            </a:pPr>
-            <a:r>
-              <a:rPr lang="en-US" sz="700" b="1" dirty="0">
-                <a:solidFill>
-                  <a:srgbClr val="2D3142"/>
-                </a:solidFill>
-                <a:latin typeface="Microsoft YaHei" pitchFamily="34" charset="0"/>
-                <a:ea typeface="Microsoft YaHei" pitchFamily="34" charset="-122"/>
-                <a:cs typeface="Microsoft YaHei" pitchFamily="34" charset="-120"/>
-              </a:rPr>
-              <a:t>LLM 适配器</a:t>
-            </a:r>
-            <a:endParaRPr lang="en-US" sz="700" dirty="0"/>
-          </a:p>
-        </p:txBody>
-      </p:sp>
-      <p:sp>
-        <p:nvSpPr>
-          <p:cNvPr id="25" name="Shape 23"/>
-          <p:cNvSpPr/>
-          <p:nvPr/>
-        </p:nvSpPr>
-        <p:spPr>
-          <a:xfrm>
-            <a:off x="8006721" y="1196972"/>
-            <a:ext cx="1124043" cy="449617"/>
-          </a:xfrm>
-          <a:prstGeom prst="ROUNDED_RECTANGLE">
-            <a:avLst>
-              <a:gd name="adj" fmla="val 8135"/>
-            </a:avLst>
-          </a:prstGeom>
-          <a:solidFill>
-            <a:srgbClr val="F0F1F3"/>
-          </a:solidFill>
-          <a:ln w="6350">
-            <a:solidFill>
-              <a:srgbClr val="4F5D75"/>
-            </a:solidFill>
-            <a:prstDash val="solid"/>
-          </a:ln>
-        </p:spPr>
-      </p:sp>
-      <p:sp>
-        <p:nvSpPr>
-          <p:cNvPr id="26" name="Text 24"/>
-          <p:cNvSpPr/>
-          <p:nvPr/>
-        </p:nvSpPr>
-        <p:spPr>
-          <a:xfrm>
-            <a:off x="8006721" y="1196972"/>
-            <a:ext cx="1124043" cy="240866"/>
-          </a:xfrm>
-          <a:prstGeom prst="rect">
-            <a:avLst/>
-          </a:prstGeom>
-          <a:noFill/>
-          <a:ln/>
-        </p:spPr>
-        <p:txBody>
-          <a:bodyPr wrap="square" lIns="0" tIns="0" rIns="0" bIns="0" rtlCol="0" anchor="ctr"/>
-          <a:lstStyle/>
-          <a:p>
-            <a:pPr algn="ctr" indent="0" marL="0">
-              <a:buNone/>
-            </a:pPr>
-            <a:r>
-              <a:rPr lang="en-US" sz="700" b="1" dirty="0">
-                <a:solidFill>
-                  <a:srgbClr val="2D3142"/>
-                </a:solidFill>
-                <a:latin typeface="Microsoft YaHei" pitchFamily="34" charset="0"/>
-                <a:ea typeface="Microsoft YaHei" pitchFamily="34" charset="-122"/>
-                <a:cs typeface="Microsoft YaHei" pitchFamily="34" charset="-120"/>
-              </a:rPr>
-              <a:t>Kùzu 图后端</a:t>
-            </a:r>
-            <a:endParaRPr lang="en-US" sz="700" dirty="0"/>
-          </a:p>
-        </p:txBody>
-      </p:sp>
-      <p:sp>
-        <p:nvSpPr>
-          <p:cNvPr id="27" name="Shape 25"/>
-          <p:cNvSpPr/>
-          <p:nvPr/>
-        </p:nvSpPr>
-        <p:spPr>
-          <a:xfrm>
-            <a:off x="1471214" y="1935629"/>
-            <a:ext cx="4496172" cy="2248086"/>
-          </a:xfrm>
-          <a:prstGeom prst="ROUNDED_RECTANGLE">
-            <a:avLst>
-              <a:gd name="adj" fmla="val 2440"/>
-            </a:avLst>
-          </a:prstGeom>
-          <a:solidFill>
-            <a:srgbClr val="FDF5EF"/>
-          </a:solidFill>
-          <a:ln w="8890">
-            <a:solidFill>
-              <a:srgbClr val="EB6C36"/>
-            </a:solidFill>
-            <a:prstDash val="solid"/>
-          </a:ln>
-        </p:spPr>
-      </p:sp>
-      <p:sp>
-        <p:nvSpPr>
-          <p:cNvPr id="28" name="Text 26"/>
-          <p:cNvSpPr/>
-          <p:nvPr/>
-        </p:nvSpPr>
-        <p:spPr>
-          <a:xfrm>
-            <a:off x="3719300" y="1935629"/>
-            <a:ext cx="4496172" cy="80289"/>
-          </a:xfrm>
-          <a:prstGeom prst="rect">
-            <a:avLst/>
-          </a:prstGeom>
-          <a:noFill/>
-          <a:ln/>
-        </p:spPr>
-        <p:txBody>
-          <a:bodyPr wrap="square" lIns="0" tIns="0" rIns="0" bIns="0" rtlCol="0" anchor="ctr"/>
-          <a:lstStyle/>
-          <a:p>
-            <a:pPr algn="ctr" indent="0" marL="0">
-              <a:buNone/>
-            </a:pPr>
-            <a:r>
-              <a:rPr lang="en-US" sz="500" dirty="0">
-                <a:solidFill>
-                  <a:srgbClr val="EB6C36"/>
-                </a:solidFill>
-                <a:latin typeface="Consolas" pitchFamily="34" charset="0"/>
-                <a:ea typeface="Consolas" pitchFamily="34" charset="-122"/>
-                <a:cs typeface="Consolas" pitchFamily="34" charset="-120"/>
-              </a:rPr>
-              <a:t>KNOWLEDGE MAP 知识地图</a:t>
-            </a:r>
-            <a:endParaRPr lang="en-US" sz="500" dirty="0"/>
-          </a:p>
-        </p:txBody>
-      </p:sp>
-      <p:sp>
-        <p:nvSpPr>
-          <p:cNvPr id="29" name="Shape 27"/>
-          <p:cNvSpPr/>
-          <p:nvPr/>
-        </p:nvSpPr>
-        <p:spPr>
-          <a:xfrm>
-            <a:off x="1567560" y="2096206"/>
-            <a:ext cx="4303479" cy="224809"/>
-          </a:xfrm>
-          <a:prstGeom prst="ROUNDED_RECTANGLE">
-            <a:avLst>
-              <a:gd name="adj" fmla="val 16270"/>
-            </a:avLst>
-          </a:prstGeom>
-          <a:solidFill>
-            <a:srgbClr val="FDF0E8"/>
-          </a:solidFill>
-          <a:ln w="5080">
-            <a:solidFill>
-              <a:srgbClr val="EB6C36"/>
-            </a:solidFill>
-            <a:prstDash val="dash"/>
-          </a:ln>
-        </p:spPr>
-      </p:sp>
-      <p:sp>
-        <p:nvSpPr>
-          <p:cNvPr id="30" name="Text 28"/>
-          <p:cNvSpPr/>
-          <p:nvPr/>
-        </p:nvSpPr>
-        <p:spPr>
-          <a:xfrm>
-            <a:off x="1567560" y="2096206"/>
-            <a:ext cx="4303479" cy="224809"/>
-          </a:xfrm>
-          <a:prstGeom prst="rect">
-            <a:avLst/>
-          </a:prstGeom>
-          <a:noFill/>
-          <a:ln/>
-        </p:spPr>
-        <p:txBody>
-          <a:bodyPr wrap="square" lIns="0" tIns="0" rIns="0" bIns="0" rtlCol="0" anchor="ctr"/>
-          <a:lstStyle/>
-          <a:p>
-            <a:pPr algn="ctr" indent="0" marL="0">
-              <a:buNone/>
-            </a:pPr>
-            <a:r>
-              <a:rPr lang="en-US" sz="600" b="1" dirty="0">
-                <a:solidFill>
-                  <a:srgbClr val="2D3142"/>
-                </a:solidFill>
-                <a:latin typeface="Microsoft YaHei" pitchFamily="34" charset="0"/>
-                <a:ea typeface="Microsoft YaHei" pitchFamily="34" charset="-122"/>
-                <a:cs typeface="Microsoft YaHei" pitchFamily="34" charset="-120"/>
-              </a:rPr>
-              <a:t>知识地图 = 场景 × 任务 × KI 条目 · 按 skillId 路由</a:t>
-            </a:r>
-            <a:endParaRPr lang="en-US" sz="600" dirty="0"/>
-          </a:p>
-        </p:txBody>
-      </p:sp>
-      <p:sp>
-        <p:nvSpPr>
-          <p:cNvPr id="31" name="Shape 29"/>
-          <p:cNvSpPr/>
-          <p:nvPr/>
-        </p:nvSpPr>
-        <p:spPr>
-          <a:xfrm>
-            <a:off x="1567560" y="2417361"/>
-            <a:ext cx="1348852" cy="1670007"/>
-          </a:xfrm>
-          <a:prstGeom prst="ROUNDED_RECTANGLE">
-            <a:avLst>
-              <a:gd name="adj" fmla="val 2712"/>
-            </a:avLst>
-          </a:prstGeom>
-          <a:solidFill>
-            <a:srgbClr val="FDF0E8"/>
-          </a:solidFill>
-          <a:ln w="6350">
-            <a:solidFill>
-              <a:srgbClr val="EB6C36"/>
-            </a:solidFill>
-            <a:prstDash val="solid"/>
-          </a:ln>
-        </p:spPr>
-      </p:sp>
-      <p:sp>
-        <p:nvSpPr>
-          <p:cNvPr id="32" name="Text 30"/>
-          <p:cNvSpPr/>
-          <p:nvPr/>
-        </p:nvSpPr>
-        <p:spPr>
-          <a:xfrm>
-            <a:off x="1567560" y="2417361"/>
-            <a:ext cx="1348852" cy="160578"/>
-          </a:xfrm>
-          <a:prstGeom prst="rect">
-            <a:avLst/>
-          </a:prstGeom>
-          <a:noFill/>
-          <a:ln/>
-        </p:spPr>
-        <p:txBody>
-          <a:bodyPr wrap="square" lIns="0" tIns="0" rIns="0" bIns="0" rtlCol="0" anchor="ctr"/>
-          <a:lstStyle/>
-          <a:p>
-            <a:pPr algn="ctr" indent="0" marL="0">
-              <a:buNone/>
-            </a:pPr>
-            <a:r>
-              <a:rPr lang="en-US" sz="700" b="1" dirty="0">
-                <a:solidFill>
-                  <a:srgbClr val="2D3142"/>
-                </a:solidFill>
-                <a:latin typeface="Microsoft YaHei" pitchFamily="34" charset="0"/>
-                <a:ea typeface="Microsoft YaHei" pitchFamily="34" charset="-122"/>
-                <a:cs typeface="Microsoft YaHei" pitchFamily="34" charset="-120"/>
-              </a:rPr>
-              <a:t>KM-OUTREACH</a:t>
-            </a:r>
-            <a:endParaRPr lang="en-US" sz="700" dirty="0"/>
-          </a:p>
-        </p:txBody>
-      </p:sp>
-      <p:sp>
-        <p:nvSpPr>
-          <p:cNvPr id="33" name="Text 31"/>
-          <p:cNvSpPr/>
-          <p:nvPr/>
-        </p:nvSpPr>
-        <p:spPr>
-          <a:xfrm>
-            <a:off x="1567560" y="2577939"/>
-            <a:ext cx="1348852" cy="112404"/>
-          </a:xfrm>
-          <a:prstGeom prst="rect">
-            <a:avLst/>
-          </a:prstGeom>
-          <a:noFill/>
-          <a:ln/>
-        </p:spPr>
-        <p:txBody>
-          <a:bodyPr wrap="square" lIns="0" tIns="0" rIns="0" bIns="0" rtlCol="0" anchor="ctr"/>
-          <a:lstStyle/>
-          <a:p>
-            <a:pPr algn="ctr" indent="0" marL="0">
-              <a:buNone/>
-            </a:pPr>
-            <a:r>
-              <a:rPr lang="en-US" sz="550" dirty="0">
-                <a:solidFill>
-                  <a:srgbClr val="4F5D75"/>
-                </a:solidFill>
-                <a:latin typeface="Consolas" pitchFamily="34" charset="0"/>
-                <a:ea typeface="Consolas" pitchFamily="34" charset="-122"/>
-                <a:cs typeface="Consolas" pitchFamily="34" charset="-120"/>
-              </a:rPr>
-              <a:t>外联脚本</a:t>
-            </a:r>
-            <a:endParaRPr lang="en-US" sz="550" dirty="0"/>
-          </a:p>
-        </p:txBody>
-      </p:sp>
-      <p:sp>
-        <p:nvSpPr>
-          <p:cNvPr id="34" name="Text 32"/>
-          <p:cNvSpPr/>
-          <p:nvPr/>
-        </p:nvSpPr>
-        <p:spPr>
-          <a:xfrm>
-            <a:off x="1567560" y="2722459"/>
-            <a:ext cx="1348852" cy="112404"/>
-          </a:xfrm>
-          <a:prstGeom prst="rect">
-            <a:avLst/>
-          </a:prstGeom>
-          <a:noFill/>
-          <a:ln/>
-        </p:spPr>
-        <p:txBody>
-          <a:bodyPr wrap="square" lIns="0" tIns="0" rIns="0" bIns="0" rtlCol="0" anchor="ctr"/>
-          <a:lstStyle/>
-          <a:p>
-            <a:pPr algn="ctr" indent="0" marL="0">
-              <a:buNone/>
-            </a:pPr>
-            <a:r>
-              <a:rPr lang="en-US" sz="500" dirty="0">
-                <a:solidFill>
-                  <a:srgbClr val="EB6C36"/>
-                </a:solidFill>
-                <a:latin typeface="Consolas" pitchFamily="34" charset="0"/>
-                <a:ea typeface="Consolas" pitchFamily="34" charset="-122"/>
-                <a:cs typeface="Consolas" pitchFamily="34" charset="-120"/>
-              </a:rPr>
-              <a:t>→ KI-009/FRONT-004/006</a:t>
-            </a:r>
-            <a:endParaRPr lang="en-US" sz="500" dirty="0"/>
-          </a:p>
-        </p:txBody>
-      </p:sp>
-      <p:sp>
-        <p:nvSpPr>
-          <p:cNvPr id="35" name="Shape 33"/>
-          <p:cNvSpPr/>
-          <p:nvPr/>
-        </p:nvSpPr>
-        <p:spPr>
-          <a:xfrm>
-            <a:off x="3028816" y="2417361"/>
-            <a:ext cx="1348852" cy="1670007"/>
-          </a:xfrm>
-          <a:prstGeom prst="ROUNDED_RECTANGLE">
-            <a:avLst>
-              <a:gd name="adj" fmla="val 2712"/>
-            </a:avLst>
-          </a:prstGeom>
-          <a:solidFill>
-            <a:srgbClr val="FDF0E8"/>
-          </a:solidFill>
-          <a:ln w="6350">
-            <a:solidFill>
-              <a:srgbClr val="EB6C36"/>
-            </a:solidFill>
-            <a:prstDash val="solid"/>
-          </a:ln>
-        </p:spPr>
-      </p:sp>
-      <p:sp>
-        <p:nvSpPr>
-          <p:cNvPr id="36" name="Text 34"/>
-          <p:cNvSpPr/>
-          <p:nvPr/>
-        </p:nvSpPr>
-        <p:spPr>
-          <a:xfrm>
-            <a:off x="3028816" y="2417361"/>
-            <a:ext cx="1348852" cy="160578"/>
-          </a:xfrm>
-          <a:prstGeom prst="rect">
-            <a:avLst/>
-          </a:prstGeom>
-          <a:noFill/>
-          <a:ln/>
-        </p:spPr>
-        <p:txBody>
-          <a:bodyPr wrap="square" lIns="0" tIns="0" rIns="0" bIns="0" rtlCol="0" anchor="ctr"/>
-          <a:lstStyle/>
-          <a:p>
-            <a:pPr algn="ctr" indent="0" marL="0">
-              <a:buNone/>
-            </a:pPr>
-            <a:r>
-              <a:rPr lang="en-US" sz="700" b="1" dirty="0">
-                <a:solidFill>
-                  <a:srgbClr val="2D3142"/>
-                </a:solidFill>
-                <a:latin typeface="Microsoft YaHei" pitchFamily="34" charset="0"/>
-                <a:ea typeface="Microsoft YaHei" pitchFamily="34" charset="-122"/>
-                <a:cs typeface="Microsoft YaHei" pitchFamily="34" charset="-120"/>
-              </a:rPr>
-              <a:t>KM-MEETING</a:t>
-            </a:r>
-            <a:endParaRPr lang="en-US" sz="700" dirty="0"/>
-          </a:p>
-        </p:txBody>
-      </p:sp>
-      <p:sp>
-        <p:nvSpPr>
-          <p:cNvPr id="37" name="Text 35"/>
-          <p:cNvSpPr/>
-          <p:nvPr/>
-        </p:nvSpPr>
-        <p:spPr>
-          <a:xfrm>
-            <a:off x="3028816" y="2577939"/>
-            <a:ext cx="1348852" cy="112404"/>
-          </a:xfrm>
-          <a:prstGeom prst="rect">
-            <a:avLst/>
-          </a:prstGeom>
-          <a:noFill/>
-          <a:ln/>
-        </p:spPr>
-        <p:txBody>
-          <a:bodyPr wrap="square" lIns="0" tIns="0" rIns="0" bIns="0" rtlCol="0" anchor="ctr"/>
-          <a:lstStyle/>
-          <a:p>
-            <a:pPr algn="ctr" indent="0" marL="0">
-              <a:buNone/>
-            </a:pPr>
-            <a:r>
-              <a:rPr lang="en-US" sz="550" dirty="0">
-                <a:solidFill>
-                  <a:srgbClr val="4F5D75"/>
-                </a:solidFill>
-                <a:latin typeface="Consolas" pitchFamily="34" charset="0"/>
-                <a:ea typeface="Consolas" pitchFamily="34" charset="-122"/>
-                <a:cs typeface="Consolas" pitchFamily="34" charset="-120"/>
-              </a:rPr>
-              <a:t>会面脚本</a:t>
-            </a:r>
-            <a:endParaRPr lang="en-US" sz="550" dirty="0"/>
-          </a:p>
-        </p:txBody>
-      </p:sp>
-      <p:sp>
-        <p:nvSpPr>
-          <p:cNvPr id="38" name="Text 36"/>
-          <p:cNvSpPr/>
-          <p:nvPr/>
-        </p:nvSpPr>
-        <p:spPr>
-          <a:xfrm>
-            <a:off x="3028816" y="2722459"/>
-            <a:ext cx="1348852" cy="112404"/>
-          </a:xfrm>
-          <a:prstGeom prst="rect">
-            <a:avLst/>
-          </a:prstGeom>
-          <a:noFill/>
-          <a:ln/>
-        </p:spPr>
-        <p:txBody>
-          <a:bodyPr wrap="square" lIns="0" tIns="0" rIns="0" bIns="0" rtlCol="0" anchor="ctr"/>
-          <a:lstStyle/>
-          <a:p>
-            <a:pPr algn="ctr" indent="0" marL="0">
-              <a:buNone/>
-            </a:pPr>
-            <a:r>
-              <a:rPr lang="en-US" sz="500" dirty="0">
-                <a:solidFill>
-                  <a:srgbClr val="EB6C36"/>
-                </a:solidFill>
-                <a:latin typeface="Consolas" pitchFamily="34" charset="0"/>
-                <a:ea typeface="Consolas" pitchFamily="34" charset="-122"/>
-                <a:cs typeface="Consolas" pitchFamily="34" charset="-120"/>
-              </a:rPr>
-              <a:t>→ KI-009/004/005/006</a:t>
-            </a:r>
-            <a:endParaRPr lang="en-US" sz="500" dirty="0"/>
-          </a:p>
-        </p:txBody>
-      </p:sp>
-      <p:sp>
-        <p:nvSpPr>
-          <p:cNvPr id="39" name="Shape 37"/>
-          <p:cNvSpPr/>
-          <p:nvPr/>
-        </p:nvSpPr>
-        <p:spPr>
-          <a:xfrm>
-            <a:off x="4490072" y="2417361"/>
-            <a:ext cx="1348852" cy="1670007"/>
-          </a:xfrm>
-          <a:prstGeom prst="ROUNDED_RECTANGLE">
-            <a:avLst>
-              <a:gd name="adj" fmla="val 2712"/>
-            </a:avLst>
-          </a:prstGeom>
-          <a:solidFill>
-            <a:srgbClr val="FDF0E8"/>
-          </a:solidFill>
-          <a:ln w="6350">
-            <a:solidFill>
-              <a:srgbClr val="EB6C36"/>
-            </a:solidFill>
-            <a:prstDash val="solid"/>
-          </a:ln>
-        </p:spPr>
-      </p:sp>
-      <p:sp>
-        <p:nvSpPr>
-          <p:cNvPr id="40" name="Text 38"/>
-          <p:cNvSpPr/>
-          <p:nvPr/>
-        </p:nvSpPr>
-        <p:spPr>
-          <a:xfrm>
-            <a:off x="4490072" y="2417361"/>
-            <a:ext cx="1348852" cy="160578"/>
-          </a:xfrm>
-          <a:prstGeom prst="rect">
-            <a:avLst/>
-          </a:prstGeom>
-          <a:noFill/>
-          <a:ln/>
-        </p:spPr>
-        <p:txBody>
-          <a:bodyPr wrap="square" lIns="0" tIns="0" rIns="0" bIns="0" rtlCol="0" anchor="ctr"/>
-          <a:lstStyle/>
-          <a:p>
-            <a:pPr algn="ctr" indent="0" marL="0">
-              <a:buNone/>
-            </a:pPr>
-            <a:r>
-              <a:rPr lang="en-US" sz="700" b="1" dirty="0">
-                <a:solidFill>
-                  <a:srgbClr val="2D3142"/>
-                </a:solidFill>
-                <a:latin typeface="Microsoft YaHei" pitchFamily="34" charset="0"/>
-                <a:ea typeface="Microsoft YaHei" pitchFamily="34" charset="-122"/>
-                <a:cs typeface="Microsoft YaHei" pitchFamily="34" charset="-120"/>
-              </a:rPr>
-              <a:t>KM-PREVISIT</a:t>
-            </a:r>
-            <a:endParaRPr lang="en-US" sz="700" dirty="0"/>
-          </a:p>
-        </p:txBody>
-      </p:sp>
-      <p:sp>
-        <p:nvSpPr>
-          <p:cNvPr id="41" name="Text 39"/>
-          <p:cNvSpPr/>
-          <p:nvPr/>
-        </p:nvSpPr>
-        <p:spPr>
-          <a:xfrm>
-            <a:off x="4490072" y="2577939"/>
-            <a:ext cx="1348852" cy="112404"/>
-          </a:xfrm>
-          <a:prstGeom prst="rect">
-            <a:avLst/>
-          </a:prstGeom>
-          <a:noFill/>
-          <a:ln/>
-        </p:spPr>
-        <p:txBody>
-          <a:bodyPr wrap="square" lIns="0" tIns="0" rIns="0" bIns="0" rtlCol="0" anchor="ctr"/>
-          <a:lstStyle/>
-          <a:p>
-            <a:pPr algn="ctr" indent="0" marL="0">
-              <a:buNone/>
-            </a:pPr>
-            <a:r>
-              <a:rPr lang="en-US" sz="550" dirty="0">
-                <a:solidFill>
-                  <a:srgbClr val="4F5D75"/>
-                </a:solidFill>
-                <a:latin typeface="Consolas" pitchFamily="34" charset="0"/>
-                <a:ea typeface="Consolas" pitchFamily="34" charset="-122"/>
-                <a:cs typeface="Consolas" pitchFamily="34" charset="-120"/>
-              </a:rPr>
-              <a:t>访前报告</a:t>
-            </a:r>
-            <a:endParaRPr lang="en-US" sz="550" dirty="0"/>
-          </a:p>
-        </p:txBody>
-      </p:sp>
-      <p:sp>
-        <p:nvSpPr>
-          <p:cNvPr id="42" name="Text 40"/>
-          <p:cNvSpPr/>
-          <p:nvPr/>
-        </p:nvSpPr>
-        <p:spPr>
-          <a:xfrm>
-            <a:off x="4490072" y="2722459"/>
-            <a:ext cx="1348852" cy="112404"/>
-          </a:xfrm>
-          <a:prstGeom prst="rect">
-            <a:avLst/>
-          </a:prstGeom>
-          <a:noFill/>
-          <a:ln/>
-        </p:spPr>
-        <p:txBody>
-          <a:bodyPr wrap="square" lIns="0" tIns="0" rIns="0" bIns="0" rtlCol="0" anchor="ctr"/>
-          <a:lstStyle/>
-          <a:p>
-            <a:pPr algn="ctr" indent="0" marL="0">
-              <a:buNone/>
-            </a:pPr>
-            <a:r>
-              <a:rPr lang="en-US" sz="500" dirty="0">
-                <a:solidFill>
-                  <a:srgbClr val="EB6C36"/>
-                </a:solidFill>
-                <a:latin typeface="Consolas" pitchFamily="34" charset="0"/>
-                <a:ea typeface="Consolas" pitchFamily="34" charset="-122"/>
-                <a:cs typeface="Consolas" pitchFamily="34" charset="-120"/>
-              </a:rPr>
-              <a:t>→ KI-FRONT-001~007</a:t>
-            </a:r>
-            <a:endParaRPr lang="en-US" sz="500" dirty="0"/>
-          </a:p>
-        </p:txBody>
-      </p:sp>
-      <p:sp>
-        <p:nvSpPr>
-          <p:cNvPr id="43" name="Shape 41"/>
-          <p:cNvSpPr/>
-          <p:nvPr/>
-        </p:nvSpPr>
-        <p:spPr>
-          <a:xfrm>
-            <a:off x="6160079" y="1935629"/>
-            <a:ext cx="4560403" cy="2248086"/>
-          </a:xfrm>
-          <a:prstGeom prst="ROUNDED_RECTANGLE">
-            <a:avLst>
-              <a:gd name="adj" fmla="val 2440"/>
-            </a:avLst>
-          </a:prstGeom>
-          <a:solidFill>
-            <a:srgbClr val="ECECEC"/>
-          </a:solidFill>
-          <a:ln w="5080">
-            <a:solidFill>
-              <a:srgbClr val="4F5D75"/>
-            </a:solidFill>
-            <a:prstDash val="solid"/>
-          </a:ln>
-        </p:spPr>
-      </p:sp>
-      <p:sp>
-        <p:nvSpPr>
-          <p:cNvPr id="44" name="Text 42"/>
-          <p:cNvSpPr/>
-          <p:nvPr/>
-        </p:nvSpPr>
-        <p:spPr>
-          <a:xfrm>
-            <a:off x="8440280" y="1935629"/>
-            <a:ext cx="4560403" cy="80289"/>
-          </a:xfrm>
-          <a:prstGeom prst="rect">
-            <a:avLst/>
-          </a:prstGeom>
-          <a:noFill/>
-          <a:ln/>
-        </p:spPr>
-        <p:txBody>
-          <a:bodyPr wrap="square" lIns="0" tIns="0" rIns="0" bIns="0" rtlCol="0" anchor="ctr"/>
-          <a:lstStyle/>
-          <a:p>
-            <a:pPr algn="ctr" indent="0" marL="0">
-              <a:buNone/>
-            </a:pPr>
-            <a:r>
-              <a:rPr lang="en-US" sz="500" dirty="0">
-                <a:solidFill>
-                  <a:srgbClr val="7A8399"/>
-                </a:solidFill>
-                <a:latin typeface="Consolas" pitchFamily="34" charset="0"/>
-                <a:ea typeface="Consolas" pitchFamily="34" charset="-122"/>
-                <a:cs typeface="Consolas" pitchFamily="34" charset="-120"/>
-              </a:rPr>
-              <a:t>KNOWLEDGE CATALOG 知识目录</a:t>
-            </a:r>
-            <a:endParaRPr lang="en-US" sz="500" dirty="0"/>
-          </a:p>
-        </p:txBody>
-      </p:sp>
-      <p:sp>
-        <p:nvSpPr>
-          <p:cNvPr id="45" name="Shape 43"/>
-          <p:cNvSpPr/>
-          <p:nvPr/>
-        </p:nvSpPr>
-        <p:spPr>
-          <a:xfrm>
-            <a:off x="6256425" y="2096206"/>
-            <a:ext cx="4367710" cy="224809"/>
-          </a:xfrm>
-          <a:prstGeom prst="ROUNDED_RECTANGLE">
-            <a:avLst>
-              <a:gd name="adj" fmla="val 16270"/>
-            </a:avLst>
-          </a:prstGeom>
-          <a:solidFill>
-            <a:srgbClr val="F0F1F3"/>
-          </a:solidFill>
-          <a:ln w="5080">
-            <a:solidFill>
-              <a:srgbClr val="4F5D75"/>
-            </a:solidFill>
-            <a:prstDash val="dash"/>
-          </a:ln>
-        </p:spPr>
-      </p:sp>
-      <p:sp>
-        <p:nvSpPr>
-          <p:cNvPr id="46" name="Text 44"/>
-          <p:cNvSpPr/>
-          <p:nvPr/>
-        </p:nvSpPr>
-        <p:spPr>
-          <a:xfrm>
-            <a:off x="6256425" y="2096206"/>
-            <a:ext cx="4367710" cy="224809"/>
-          </a:xfrm>
-          <a:prstGeom prst="rect">
-            <a:avLst/>
-          </a:prstGeom>
-          <a:noFill/>
-          <a:ln/>
-        </p:spPr>
-        <p:txBody>
-          <a:bodyPr wrap="square" lIns="0" tIns="0" rIns="0" bIns="0" rtlCol="0" anchor="ctr"/>
-          <a:lstStyle/>
-          <a:p>
-            <a:pPr algn="ctr" indent="0" marL="0">
-              <a:buNone/>
-            </a:pPr>
-            <a:r>
-              <a:rPr lang="en-US" sz="600" b="1" dirty="0">
-                <a:solidFill>
-                  <a:srgbClr val="2D3142"/>
-                </a:solidFill>
-                <a:latin typeface="Microsoft YaHei" pitchFamily="34" charset="0"/>
-                <a:ea typeface="Microsoft YaHei" pitchFamily="34" charset="-122"/>
-                <a:cs typeface="Microsoft YaHei" pitchFamily="34" charset="-120"/>
-              </a:rPr>
-              <a:t>知识目录 = 可检索索引 · /v1/catalog</a:t>
-            </a:r>
-            <a:endParaRPr lang="en-US" sz="600" dirty="0"/>
-          </a:p>
-        </p:txBody>
-      </p:sp>
-      <p:sp>
-        <p:nvSpPr>
-          <p:cNvPr id="47" name="Shape 45"/>
-          <p:cNvSpPr/>
-          <p:nvPr/>
-        </p:nvSpPr>
-        <p:spPr>
-          <a:xfrm>
-            <a:off x="6256425" y="2417361"/>
-            <a:ext cx="1348852" cy="1670007"/>
-          </a:xfrm>
-          <a:prstGeom prst="ROUNDED_RECTANGLE">
-            <a:avLst>
-              <a:gd name="adj" fmla="val 2712"/>
-            </a:avLst>
-          </a:prstGeom>
-          <a:solidFill>
-            <a:srgbClr val="FFFFFF"/>
-          </a:solidFill>
-          <a:ln w="6350">
-            <a:solidFill>
-              <a:srgbClr val="2D3142"/>
-            </a:solidFill>
-            <a:prstDash val="solid"/>
-          </a:ln>
-        </p:spPr>
-      </p:sp>
-      <p:sp>
-        <p:nvSpPr>
-          <p:cNvPr id="48" name="Text 46"/>
-          <p:cNvSpPr/>
-          <p:nvPr/>
-        </p:nvSpPr>
-        <p:spPr>
-          <a:xfrm>
-            <a:off x="6256425" y="2417361"/>
-            <a:ext cx="1348852" cy="160578"/>
-          </a:xfrm>
-          <a:prstGeom prst="rect">
-            <a:avLst/>
-          </a:prstGeom>
-          <a:noFill/>
-          <a:ln/>
-        </p:spPr>
-        <p:txBody>
-          <a:bodyPr wrap="square" lIns="0" tIns="0" rIns="0" bIns="0" rtlCol="0" anchor="ctr"/>
-          <a:lstStyle/>
-          <a:p>
-            <a:pPr algn="ctr" indent="0" marL="0">
-              <a:buNone/>
-            </a:pPr>
-            <a:r>
-              <a:rPr lang="en-US" sz="700" b="1" dirty="0">
-                <a:solidFill>
-                  <a:srgbClr val="2D3142"/>
-                </a:solidFill>
-                <a:latin typeface="Microsoft YaHei" pitchFamily="34" charset="0"/>
-                <a:ea typeface="Microsoft YaHei" pitchFamily="34" charset="-122"/>
-                <a:cs typeface="Microsoft YaHei" pitchFamily="34" charset="-120"/>
-              </a:rPr>
-              <a:t>知识条目 KI</a:t>
-            </a:r>
-            <a:endParaRPr lang="en-US" sz="700" dirty="0"/>
-          </a:p>
-        </p:txBody>
-      </p:sp>
-      <p:sp>
-        <p:nvSpPr>
-          <p:cNvPr id="49" name="Shape 47"/>
-          <p:cNvSpPr/>
-          <p:nvPr/>
-        </p:nvSpPr>
-        <p:spPr>
-          <a:xfrm>
-            <a:off x="7733739" y="2417361"/>
-            <a:ext cx="1348852" cy="1670007"/>
-          </a:xfrm>
-          <a:prstGeom prst="ROUNDED_RECTANGLE">
-            <a:avLst>
-              <a:gd name="adj" fmla="val 2712"/>
-            </a:avLst>
-          </a:prstGeom>
-          <a:solidFill>
-            <a:srgbClr val="F0F1F3"/>
-          </a:solidFill>
-          <a:ln w="6350">
-            <a:solidFill>
-              <a:srgbClr val="4F5D75"/>
-            </a:solidFill>
-            <a:prstDash val="solid"/>
-          </a:ln>
-        </p:spPr>
-      </p:sp>
-      <p:sp>
-        <p:nvSpPr>
-          <p:cNvPr id="50" name="Text 48"/>
-          <p:cNvSpPr/>
-          <p:nvPr/>
-        </p:nvSpPr>
-        <p:spPr>
-          <a:xfrm>
-            <a:off x="7733739" y="2417361"/>
-            <a:ext cx="1348852" cy="160578"/>
-          </a:xfrm>
-          <a:prstGeom prst="rect">
-            <a:avLst/>
-          </a:prstGeom>
-          <a:noFill/>
-          <a:ln/>
-        </p:spPr>
-        <p:txBody>
-          <a:bodyPr wrap="square" lIns="0" tIns="0" rIns="0" bIns="0" rtlCol="0" anchor="ctr"/>
-          <a:lstStyle/>
-          <a:p>
-            <a:pPr algn="ctr" indent="0" marL="0">
-              <a:buNone/>
-            </a:pPr>
-            <a:r>
-              <a:rPr lang="en-US" sz="700" b="1" dirty="0">
-                <a:solidFill>
-                  <a:srgbClr val="2D3142"/>
-                </a:solidFill>
-                <a:latin typeface="Microsoft YaHei" pitchFamily="34" charset="0"/>
-                <a:ea typeface="Microsoft YaHei" pitchFamily="34" charset="-122"/>
-                <a:cs typeface="Microsoft YaHei" pitchFamily="34" charset="-120"/>
-              </a:rPr>
-              <a:t>知识要素 KE</a:t>
-            </a:r>
-            <a:endParaRPr lang="en-US" sz="700" dirty="0"/>
-          </a:p>
-        </p:txBody>
-      </p:sp>
-      <p:sp>
-        <p:nvSpPr>
-          <p:cNvPr id="51" name="Shape 49"/>
-          <p:cNvSpPr/>
-          <p:nvPr/>
-        </p:nvSpPr>
-        <p:spPr>
-          <a:xfrm>
-            <a:off x="9211052" y="2417361"/>
-            <a:ext cx="1348852" cy="1670007"/>
-          </a:xfrm>
-          <a:prstGeom prst="ROUNDED_RECTANGLE">
-            <a:avLst>
-              <a:gd name="adj" fmla="val 2712"/>
-            </a:avLst>
-          </a:prstGeom>
-          <a:solidFill>
-            <a:srgbClr val="F0F1F3"/>
-          </a:solidFill>
-          <a:ln w="6350">
-            <a:solidFill>
-              <a:srgbClr val="4F5D75"/>
-            </a:solidFill>
-            <a:prstDash val="solid"/>
-          </a:ln>
-        </p:spPr>
-      </p:sp>
-      <p:sp>
-        <p:nvSpPr>
-          <p:cNvPr id="52" name="Text 50"/>
-          <p:cNvSpPr/>
-          <p:nvPr/>
-        </p:nvSpPr>
-        <p:spPr>
-          <a:xfrm>
-            <a:off x="9211052" y="2417361"/>
-            <a:ext cx="1348852" cy="160578"/>
-          </a:xfrm>
-          <a:prstGeom prst="rect">
-            <a:avLst/>
-          </a:prstGeom>
-          <a:noFill/>
-          <a:ln/>
-        </p:spPr>
-        <p:txBody>
-          <a:bodyPr wrap="square" lIns="0" tIns="0" rIns="0" bIns="0" rtlCol="0" anchor="ctr"/>
-          <a:lstStyle/>
-          <a:p>
-            <a:pPr algn="ctr" indent="0" marL="0">
-              <a:buNone/>
-            </a:pPr>
-            <a:r>
-              <a:rPr lang="en-US" sz="700" b="1" dirty="0">
-                <a:solidFill>
-                  <a:srgbClr val="2D3142"/>
-                </a:solidFill>
-                <a:latin typeface="Microsoft YaHei" pitchFamily="34" charset="0"/>
-                <a:ea typeface="Microsoft YaHei" pitchFamily="34" charset="-122"/>
-                <a:cs typeface="Microsoft YaHei" pitchFamily="34" charset="-120"/>
-              </a:rPr>
-              <a:t>规则 RUL</a:t>
-            </a:r>
-            <a:endParaRPr lang="en-US" sz="700" dirty="0"/>
-          </a:p>
-        </p:txBody>
-      </p:sp>
-      <p:sp>
-        <p:nvSpPr>
-          <p:cNvPr id="53" name="Shape 51"/>
-          <p:cNvSpPr/>
-          <p:nvPr/>
-        </p:nvSpPr>
-        <p:spPr>
-          <a:xfrm>
-            <a:off x="1471214" y="4376408"/>
-            <a:ext cx="9249268" cy="963465"/>
-          </a:xfrm>
-          <a:prstGeom prst="ROUNDED_RECTANGLE">
-            <a:avLst>
-              <a:gd name="adj" fmla="val 5694"/>
-            </a:avLst>
-          </a:prstGeom>
-          <a:solidFill>
-            <a:srgbClr val="ECECEC"/>
-          </a:solidFill>
-          <a:ln w="5080">
-            <a:solidFill>
-              <a:srgbClr val="4F5D75"/>
-            </a:solidFill>
-            <a:prstDash val="solid"/>
-          </a:ln>
-        </p:spPr>
-      </p:sp>
-      <p:sp>
-        <p:nvSpPr>
-          <p:cNvPr id="54" name="Text 52"/>
-          <p:cNvSpPr/>
-          <p:nvPr/>
-        </p:nvSpPr>
-        <p:spPr>
-          <a:xfrm>
-            <a:off x="6095848" y="4376408"/>
-            <a:ext cx="9249268" cy="80289"/>
-          </a:xfrm>
-          <a:prstGeom prst="rect">
-            <a:avLst/>
-          </a:prstGeom>
-          <a:noFill/>
-          <a:ln/>
-        </p:spPr>
-        <p:txBody>
-          <a:bodyPr wrap="square" lIns="0" tIns="0" rIns="0" bIns="0" rtlCol="0" anchor="ctr"/>
-          <a:lstStyle/>
-          <a:p>
-            <a:pPr algn="ctr" indent="0" marL="0">
-              <a:buNone/>
-            </a:pPr>
-            <a:r>
-              <a:rPr lang="en-US" sz="500" dirty="0">
-                <a:solidFill>
-                  <a:srgbClr val="7A8399"/>
-                </a:solidFill>
-                <a:latin typeface="Consolas" pitchFamily="34" charset="0"/>
-                <a:ea typeface="Consolas" pitchFamily="34" charset="-122"/>
-                <a:cs typeface="Consolas" pitchFamily="34" charset="-120"/>
-              </a:rPr>
-              <a:t>WORKSPACE 工作空间层</a:t>
-            </a:r>
-            <a:endParaRPr lang="en-US" sz="500" dirty="0"/>
-          </a:p>
-        </p:txBody>
-      </p:sp>
-      <p:sp>
-        <p:nvSpPr>
-          <p:cNvPr id="55" name="Shape 53"/>
-          <p:cNvSpPr/>
-          <p:nvPr/>
-        </p:nvSpPr>
-        <p:spPr>
-          <a:xfrm>
-            <a:off x="1599676" y="4553043"/>
-            <a:ext cx="1043754" cy="674426"/>
-          </a:xfrm>
-          <a:prstGeom prst="ROUNDED_RECTANGLE">
-            <a:avLst>
-              <a:gd name="adj" fmla="val 5423"/>
-            </a:avLst>
-          </a:prstGeom>
-          <a:solidFill>
-            <a:srgbClr val="F0F1F3"/>
-          </a:solidFill>
-          <a:ln w="6350">
-            <a:solidFill>
-              <a:srgbClr val="7A8399"/>
-            </a:solidFill>
-            <a:prstDash val="solid"/>
-          </a:ln>
-        </p:spPr>
-      </p:sp>
-      <p:sp>
-        <p:nvSpPr>
-          <p:cNvPr id="56" name="Text 54"/>
-          <p:cNvSpPr/>
-          <p:nvPr/>
-        </p:nvSpPr>
-        <p:spPr>
-          <a:xfrm>
-            <a:off x="1599676" y="4553043"/>
-            <a:ext cx="1043754" cy="224809"/>
-          </a:xfrm>
-          <a:prstGeom prst="rect">
-            <a:avLst/>
-          </a:prstGeom>
-          <a:noFill/>
-          <a:ln/>
-        </p:spPr>
-        <p:txBody>
-          <a:bodyPr wrap="square" lIns="0" tIns="0" rIns="0" bIns="0" rtlCol="0" anchor="ctr"/>
-          <a:lstStyle/>
-          <a:p>
-            <a:pPr algn="ctr" indent="0" marL="0">
-              <a:buNone/>
-            </a:pPr>
-            <a:r>
-              <a:rPr lang="en-US" sz="700" b="1" dirty="0">
-                <a:solidFill>
-                  <a:srgbClr val="2D3142"/>
-                </a:solidFill>
-                <a:latin typeface="Microsoft YaHei" pitchFamily="34" charset="0"/>
-                <a:ea typeface="Microsoft YaHei" pitchFamily="34" charset="-122"/>
-                <a:cs typeface="Microsoft YaHei" pitchFamily="34" charset="-120"/>
-              </a:rPr>
-              <a:t>01_raw</a:t>
-            </a:r>
-            <a:endParaRPr lang="en-US" sz="700" dirty="0"/>
-          </a:p>
-        </p:txBody>
-      </p:sp>
-      <p:sp>
-        <p:nvSpPr>
-          <p:cNvPr id="57" name="Shape 55"/>
-          <p:cNvSpPr/>
-          <p:nvPr/>
-        </p:nvSpPr>
-        <p:spPr>
-          <a:xfrm>
-            <a:off x="2787950" y="4553043"/>
-            <a:ext cx="1043754" cy="674426"/>
-          </a:xfrm>
-          <a:prstGeom prst="ROUNDED_RECTANGLE">
-            <a:avLst>
-              <a:gd name="adj" fmla="val 5423"/>
-            </a:avLst>
-          </a:prstGeom>
-          <a:solidFill>
-            <a:srgbClr val="F0F1F3"/>
-          </a:solidFill>
-          <a:ln w="6350">
-            <a:solidFill>
-              <a:srgbClr val="7A8399"/>
-            </a:solidFill>
-            <a:prstDash val="solid"/>
-          </a:ln>
-        </p:spPr>
-      </p:sp>
-      <p:sp>
-        <p:nvSpPr>
-          <p:cNvPr id="58" name="Text 56"/>
-          <p:cNvSpPr/>
-          <p:nvPr/>
-        </p:nvSpPr>
-        <p:spPr>
-          <a:xfrm>
-            <a:off x="2787950" y="4553043"/>
-            <a:ext cx="1043754" cy="224809"/>
-          </a:xfrm>
-          <a:prstGeom prst="rect">
-            <a:avLst/>
-          </a:prstGeom>
-          <a:noFill/>
-          <a:ln/>
-        </p:spPr>
-        <p:txBody>
-          <a:bodyPr wrap="square" lIns="0" tIns="0" rIns="0" bIns="0" rtlCol="0" anchor="ctr"/>
-          <a:lstStyle/>
-          <a:p>
-            <a:pPr algn="ctr" indent="0" marL="0">
-              <a:buNone/>
-            </a:pPr>
-            <a:r>
-              <a:rPr lang="en-US" sz="700" b="1" dirty="0">
-                <a:solidFill>
-                  <a:srgbClr val="2D3142"/>
-                </a:solidFill>
-                <a:latin typeface="Microsoft YaHei" pitchFamily="34" charset="0"/>
-                <a:ea typeface="Microsoft YaHei" pitchFamily="34" charset="-122"/>
-                <a:cs typeface="Microsoft YaHei" pitchFamily="34" charset="-120"/>
-              </a:rPr>
-              <a:t>02_work</a:t>
-            </a:r>
-            <a:endParaRPr lang="en-US" sz="700" dirty="0"/>
-          </a:p>
-        </p:txBody>
-      </p:sp>
-      <p:sp>
-        <p:nvSpPr>
-          <p:cNvPr id="59" name="Shape 57"/>
-          <p:cNvSpPr/>
-          <p:nvPr/>
-        </p:nvSpPr>
-        <p:spPr>
-          <a:xfrm>
-            <a:off x="3976224" y="4553043"/>
-            <a:ext cx="1204332" cy="674426"/>
-          </a:xfrm>
-          <a:prstGeom prst="ROUNDED_RECTANGLE">
-            <a:avLst>
-              <a:gd name="adj" fmla="val 5423"/>
-            </a:avLst>
-          </a:prstGeom>
-          <a:solidFill>
-            <a:srgbClr val="FDF0E8"/>
-          </a:solidFill>
-          <a:ln w="6350">
-            <a:solidFill>
-              <a:srgbClr val="EB6C36"/>
-            </a:solidFill>
-            <a:prstDash val="solid"/>
-          </a:ln>
-        </p:spPr>
-      </p:sp>
-      <p:sp>
-        <p:nvSpPr>
-          <p:cNvPr id="60" name="Text 58"/>
-          <p:cNvSpPr/>
-          <p:nvPr/>
-        </p:nvSpPr>
-        <p:spPr>
-          <a:xfrm>
-            <a:off x="3976224" y="4553043"/>
-            <a:ext cx="1204332" cy="224809"/>
-          </a:xfrm>
-          <a:prstGeom prst="rect">
-            <a:avLst/>
-          </a:prstGeom>
-          <a:noFill/>
-          <a:ln/>
-        </p:spPr>
-        <p:txBody>
-          <a:bodyPr wrap="square" lIns="0" tIns="0" rIns="0" bIns="0" rtlCol="0" anchor="ctr"/>
-          <a:lstStyle/>
-          <a:p>
-            <a:pPr algn="ctr" indent="0" marL="0">
-              <a:buNone/>
-            </a:pPr>
-            <a:r>
-              <a:rPr lang="en-US" sz="700" b="1" dirty="0">
-                <a:solidFill>
-                  <a:srgbClr val="2D3142"/>
-                </a:solidFill>
-                <a:latin typeface="Microsoft YaHei" pitchFamily="34" charset="0"/>
-                <a:ea typeface="Microsoft YaHei" pitchFamily="34" charset="-122"/>
-                <a:cs typeface="Microsoft YaHei" pitchFamily="34" charset="-120"/>
-              </a:rPr>
-              <a:t>03_core</a:t>
-            </a:r>
-            <a:endParaRPr lang="en-US" sz="700" dirty="0"/>
-          </a:p>
-        </p:txBody>
-      </p:sp>
-      <p:sp>
-        <p:nvSpPr>
-          <p:cNvPr id="61" name="Shape 59"/>
-          <p:cNvSpPr/>
-          <p:nvPr/>
-        </p:nvSpPr>
-        <p:spPr>
-          <a:xfrm>
-            <a:off x="5325075" y="4553043"/>
-            <a:ext cx="1043754" cy="674426"/>
-          </a:xfrm>
-          <a:prstGeom prst="ROUNDED_RECTANGLE">
-            <a:avLst>
-              <a:gd name="adj" fmla="val 5423"/>
-            </a:avLst>
-          </a:prstGeom>
-          <a:solidFill>
-            <a:srgbClr val="F0F1F3"/>
-          </a:solidFill>
-          <a:ln w="6350">
-            <a:solidFill>
-              <a:srgbClr val="4F5D75"/>
-            </a:solidFill>
-            <a:prstDash val="solid"/>
-          </a:ln>
-        </p:spPr>
-      </p:sp>
-      <p:sp>
-        <p:nvSpPr>
-          <p:cNvPr id="62" name="Text 60"/>
-          <p:cNvSpPr/>
-          <p:nvPr/>
-        </p:nvSpPr>
-        <p:spPr>
-          <a:xfrm>
-            <a:off x="5325075" y="4553043"/>
-            <a:ext cx="1043754" cy="224809"/>
-          </a:xfrm>
-          <a:prstGeom prst="rect">
-            <a:avLst/>
-          </a:prstGeom>
-          <a:noFill/>
-          <a:ln/>
-        </p:spPr>
-        <p:txBody>
-          <a:bodyPr wrap="square" lIns="0" tIns="0" rIns="0" bIns="0" rtlCol="0" anchor="ctr"/>
-          <a:lstStyle/>
-          <a:p>
-            <a:pPr algn="ctr" indent="0" marL="0">
-              <a:buNone/>
-            </a:pPr>
-            <a:r>
-              <a:rPr lang="en-US" sz="700" b="1" dirty="0">
-                <a:solidFill>
-                  <a:srgbClr val="2D3142"/>
-                </a:solidFill>
-                <a:latin typeface="Microsoft YaHei" pitchFamily="34" charset="0"/>
-                <a:ea typeface="Microsoft YaHei" pitchFamily="34" charset="-122"/>
-                <a:cs typeface="Microsoft YaHei" pitchFamily="34" charset="-120"/>
-              </a:rPr>
-              <a:t>04_serve</a:t>
-            </a:r>
-            <a:endParaRPr lang="en-US" sz="700" dirty="0"/>
-          </a:p>
-        </p:txBody>
-      </p:sp>
-      <p:sp>
-        <p:nvSpPr>
-          <p:cNvPr id="63" name="Shape 61"/>
-          <p:cNvSpPr/>
-          <p:nvPr/>
-        </p:nvSpPr>
-        <p:spPr>
-          <a:xfrm>
-            <a:off x="6513349" y="4553043"/>
-            <a:ext cx="1043754" cy="674426"/>
-          </a:xfrm>
-          <a:prstGeom prst="ROUNDED_RECTANGLE">
-            <a:avLst>
-              <a:gd name="adj" fmla="val 5423"/>
-            </a:avLst>
-          </a:prstGeom>
-          <a:solidFill>
-            <a:srgbClr val="F0F1F3"/>
-          </a:solidFill>
-          <a:ln w="6350">
-            <a:solidFill>
-              <a:srgbClr val="4F5D75"/>
-            </a:solidFill>
-            <a:prstDash val="solid"/>
-          </a:ln>
-        </p:spPr>
-      </p:sp>
-      <p:sp>
-        <p:nvSpPr>
-          <p:cNvPr id="64" name="Text 62"/>
-          <p:cNvSpPr/>
-          <p:nvPr/>
-        </p:nvSpPr>
-        <p:spPr>
-          <a:xfrm>
-            <a:off x="6513349" y="4553043"/>
-            <a:ext cx="1043754" cy="224809"/>
-          </a:xfrm>
-          <a:prstGeom prst="rect">
-            <a:avLst/>
-          </a:prstGeom>
-          <a:noFill/>
-          <a:ln/>
-        </p:spPr>
-        <p:txBody>
-          <a:bodyPr wrap="square" lIns="0" tIns="0" rIns="0" bIns="0" rtlCol="0" anchor="ctr"/>
-          <a:lstStyle/>
-          <a:p>
-            <a:pPr algn="ctr" indent="0" marL="0">
-              <a:buNone/>
-            </a:pPr>
-            <a:r>
-              <a:rPr lang="en-US" sz="700" b="1" dirty="0">
-                <a:solidFill>
-                  <a:srgbClr val="2D3142"/>
-                </a:solidFill>
-                <a:latin typeface="Microsoft YaHei" pitchFamily="34" charset="0"/>
-                <a:ea typeface="Microsoft YaHei" pitchFamily="34" charset="-122"/>
-                <a:cs typeface="Microsoft YaHei" pitchFamily="34" charset="-120"/>
-              </a:rPr>
-              <a:t>90_control</a:t>
-            </a:r>
-            <a:endParaRPr lang="en-US" sz="700" dirty="0"/>
-          </a:p>
-        </p:txBody>
-      </p:sp>
-      <p:sp>
-        <p:nvSpPr>
-          <p:cNvPr id="65" name="Shape 63"/>
-          <p:cNvSpPr/>
-          <p:nvPr/>
-        </p:nvSpPr>
-        <p:spPr>
-          <a:xfrm>
-            <a:off x="1471214" y="5500451"/>
-            <a:ext cx="9249268" cy="449617"/>
-          </a:xfrm>
-          <a:prstGeom prst="ROUNDED_RECTANGLE">
-            <a:avLst>
-              <a:gd name="adj" fmla="val 12202"/>
-            </a:avLst>
-          </a:prstGeom>
-          <a:solidFill>
-            <a:srgbClr val="ECECEC"/>
-          </a:solidFill>
-          <a:ln w="5080">
-            <a:solidFill>
-              <a:srgbClr val="4F5D75"/>
-            </a:solidFill>
-            <a:prstDash val="solid"/>
-          </a:ln>
-        </p:spPr>
-      </p:sp>
-      <p:sp>
-        <p:nvSpPr>
-          <p:cNvPr id="66" name="Text 64"/>
-          <p:cNvSpPr/>
-          <p:nvPr/>
-        </p:nvSpPr>
-        <p:spPr>
-          <a:xfrm>
-            <a:off x="6095848" y="5500451"/>
-            <a:ext cx="9249268" cy="80289"/>
-          </a:xfrm>
-          <a:prstGeom prst="rect">
-            <a:avLst/>
-          </a:prstGeom>
-          <a:noFill/>
-          <a:ln/>
-        </p:spPr>
-        <p:txBody>
-          <a:bodyPr wrap="square" lIns="0" tIns="0" rIns="0" bIns="0" rtlCol="0" anchor="ctr"/>
-          <a:lstStyle/>
-          <a:p>
-            <a:pPr algn="ctr" indent="0" marL="0">
-              <a:buNone/>
-            </a:pPr>
-            <a:r>
-              <a:rPr lang="en-US" sz="500" dirty="0">
-                <a:solidFill>
-                  <a:srgbClr val="7A8399"/>
-                </a:solidFill>
-                <a:latin typeface="Consolas" pitchFamily="34" charset="0"/>
-                <a:ea typeface="Consolas" pitchFamily="34" charset="-122"/>
-                <a:cs typeface="Consolas" pitchFamily="34" charset="-120"/>
-              </a:rPr>
-              <a:t>ASSET LIFECYCLE 生命周期</a:t>
-            </a:r>
-            <a:endParaRPr lang="en-US" sz="500" dirty="0"/>
-          </a:p>
-        </p:txBody>
-      </p:sp>
-      <p:sp>
-        <p:nvSpPr>
-          <p:cNvPr id="67" name="Shape 65"/>
-          <p:cNvSpPr/>
-          <p:nvPr/>
-        </p:nvSpPr>
-        <p:spPr>
-          <a:xfrm>
-            <a:off x="1599676" y="5661028"/>
-            <a:ext cx="481733" cy="192693"/>
-          </a:xfrm>
-          <a:prstGeom prst="ROUNDED_RECTANGLE">
-            <a:avLst>
-              <a:gd name="adj" fmla="val 18981"/>
-            </a:avLst>
-          </a:prstGeom>
-          <a:solidFill>
-            <a:srgbClr val="F0F1F3"/>
-          </a:solidFill>
-          <a:ln w="6350">
-            <a:solidFill>
-              <a:srgbClr val="7A8399"/>
-            </a:solidFill>
-            <a:prstDash val="solid"/>
-          </a:ln>
-        </p:spPr>
-      </p:sp>
-      <p:sp>
-        <p:nvSpPr>
-          <p:cNvPr id="68" name="Text 66"/>
-          <p:cNvSpPr/>
-          <p:nvPr/>
-        </p:nvSpPr>
-        <p:spPr>
-          <a:xfrm>
-            <a:off x="1599676" y="5661028"/>
-            <a:ext cx="481733" cy="192693"/>
-          </a:xfrm>
-          <a:prstGeom prst="rect">
-            <a:avLst/>
-          </a:prstGeom>
-          <a:noFill/>
-          <a:ln/>
-        </p:spPr>
-        <p:txBody>
-          <a:bodyPr wrap="square" lIns="0" tIns="0" rIns="0" bIns="0" rtlCol="0" anchor="ctr"/>
-          <a:lstStyle/>
-          <a:p>
-            <a:pPr algn="ctr" indent="0" marL="0">
-              <a:buNone/>
-            </a:pPr>
-            <a:r>
-              <a:rPr lang="en-US" sz="550" b="1" dirty="0">
-                <a:solidFill>
-                  <a:srgbClr val="2D3142"/>
-                </a:solidFill>
-                <a:latin typeface="Microsoft YaHei" pitchFamily="34" charset="0"/>
-                <a:ea typeface="Microsoft YaHei" pitchFamily="34" charset="-122"/>
-                <a:cs typeface="Microsoft YaHei" pitchFamily="34" charset="-120"/>
-              </a:rPr>
-              <a:t>ingest</a:t>
-            </a:r>
-            <a:endParaRPr lang="en-US" sz="550" dirty="0"/>
-          </a:p>
-        </p:txBody>
-      </p:sp>
-      <p:sp>
-        <p:nvSpPr>
-          <p:cNvPr id="69" name="Shape 67"/>
-          <p:cNvSpPr/>
-          <p:nvPr/>
-        </p:nvSpPr>
-        <p:spPr>
-          <a:xfrm>
-            <a:off x="3044874" y="5661028"/>
-            <a:ext cx="481733" cy="192693"/>
-          </a:xfrm>
-          <a:prstGeom prst="ROUNDED_RECTANGLE">
-            <a:avLst>
-              <a:gd name="adj" fmla="val 18981"/>
-            </a:avLst>
-          </a:prstGeom>
-          <a:solidFill>
-            <a:srgbClr val="F0F1F3"/>
-          </a:solidFill>
-          <a:ln w="6350">
-            <a:solidFill>
-              <a:srgbClr val="7A8399"/>
-            </a:solidFill>
-            <a:prstDash val="solid"/>
-          </a:ln>
-        </p:spPr>
-      </p:sp>
-      <p:sp>
-        <p:nvSpPr>
-          <p:cNvPr id="70" name="Text 68"/>
-          <p:cNvSpPr/>
-          <p:nvPr/>
-        </p:nvSpPr>
-        <p:spPr>
-          <a:xfrm>
-            <a:off x="3044874" y="5661028"/>
-            <a:ext cx="481733" cy="192693"/>
-          </a:xfrm>
-          <a:prstGeom prst="rect">
-            <a:avLst/>
-          </a:prstGeom>
-          <a:noFill/>
-          <a:ln/>
-        </p:spPr>
-        <p:txBody>
-          <a:bodyPr wrap="square" lIns="0" tIns="0" rIns="0" bIns="0" rtlCol="0" anchor="ctr"/>
-          <a:lstStyle/>
-          <a:p>
-            <a:pPr algn="ctr" indent="0" marL="0">
-              <a:buNone/>
-            </a:pPr>
-            <a:r>
-              <a:rPr lang="en-US" sz="550" b="1" dirty="0">
-                <a:solidFill>
-                  <a:srgbClr val="2D3142"/>
-                </a:solidFill>
-                <a:latin typeface="Microsoft YaHei" pitchFamily="34" charset="0"/>
-                <a:ea typeface="Microsoft YaHei" pitchFamily="34" charset="-122"/>
-                <a:cs typeface="Microsoft YaHei" pitchFamily="34" charset="-120"/>
-              </a:rPr>
-              <a:t>parse</a:t>
-            </a:r>
-            <a:endParaRPr lang="en-US" sz="550" dirty="0"/>
-          </a:p>
-        </p:txBody>
-      </p:sp>
-      <p:sp>
-        <p:nvSpPr>
-          <p:cNvPr id="71" name="Shape 69"/>
-          <p:cNvSpPr/>
-          <p:nvPr/>
-        </p:nvSpPr>
-        <p:spPr>
-          <a:xfrm>
-            <a:off x="4490072" y="5661028"/>
-            <a:ext cx="481733" cy="192693"/>
-          </a:xfrm>
-          <a:prstGeom prst="ROUNDED_RECTANGLE">
-            <a:avLst>
-              <a:gd name="adj" fmla="val 18981"/>
-            </a:avLst>
-          </a:prstGeom>
-          <a:solidFill>
-            <a:srgbClr val="F0F1F3"/>
-          </a:solidFill>
-          <a:ln w="6350">
-            <a:solidFill>
-              <a:srgbClr val="7A8399"/>
-            </a:solidFill>
-            <a:prstDash val="solid"/>
-          </a:ln>
-        </p:spPr>
-      </p:sp>
-      <p:sp>
-        <p:nvSpPr>
-          <p:cNvPr id="72" name="Text 70"/>
-          <p:cNvSpPr/>
-          <p:nvPr/>
-        </p:nvSpPr>
-        <p:spPr>
-          <a:xfrm>
-            <a:off x="4490072" y="5661028"/>
-            <a:ext cx="481733" cy="192693"/>
-          </a:xfrm>
-          <a:prstGeom prst="rect">
-            <a:avLst/>
-          </a:prstGeom>
-          <a:noFill/>
-          <a:ln/>
-        </p:spPr>
-        <p:txBody>
-          <a:bodyPr wrap="square" lIns="0" tIns="0" rIns="0" bIns="0" rtlCol="0" anchor="ctr"/>
-          <a:lstStyle/>
-          <a:p>
-            <a:pPr algn="ctr" indent="0" marL="0">
-              <a:buNone/>
-            </a:pPr>
-            <a:r>
-              <a:rPr lang="en-US" sz="550" b="1" dirty="0">
-                <a:solidFill>
-                  <a:srgbClr val="2D3142"/>
-                </a:solidFill>
-                <a:latin typeface="Microsoft YaHei" pitchFamily="34" charset="0"/>
-                <a:ea typeface="Microsoft YaHei" pitchFamily="34" charset="-122"/>
-                <a:cs typeface="Microsoft YaHei" pitchFamily="34" charset="-120"/>
-              </a:rPr>
-              <a:t>extract</a:t>
-            </a:r>
-            <a:endParaRPr lang="en-US" sz="550" dirty="0"/>
-          </a:p>
-        </p:txBody>
-      </p:sp>
-      <p:sp>
-        <p:nvSpPr>
-          <p:cNvPr id="73" name="Shape 71"/>
-          <p:cNvSpPr/>
-          <p:nvPr/>
-        </p:nvSpPr>
-        <p:spPr>
-          <a:xfrm>
-            <a:off x="5935270" y="5661028"/>
-            <a:ext cx="481733" cy="192693"/>
-          </a:xfrm>
-          <a:prstGeom prst="ROUNDED_RECTANGLE">
-            <a:avLst>
-              <a:gd name="adj" fmla="val 18981"/>
-            </a:avLst>
-          </a:prstGeom>
-          <a:solidFill>
-            <a:srgbClr val="F0F1F3"/>
-          </a:solidFill>
-          <a:ln w="6350">
-            <a:solidFill>
-              <a:srgbClr val="7A8399"/>
-            </a:solidFill>
-            <a:prstDash val="solid"/>
-          </a:ln>
-        </p:spPr>
-      </p:sp>
-      <p:sp>
-        <p:nvSpPr>
-          <p:cNvPr id="74" name="Text 72"/>
-          <p:cNvSpPr/>
-          <p:nvPr/>
-        </p:nvSpPr>
-        <p:spPr>
-          <a:xfrm>
-            <a:off x="5935270" y="5661028"/>
-            <a:ext cx="481733" cy="192693"/>
-          </a:xfrm>
-          <a:prstGeom prst="rect">
-            <a:avLst/>
-          </a:prstGeom>
-          <a:noFill/>
-          <a:ln/>
-        </p:spPr>
-        <p:txBody>
-          <a:bodyPr wrap="square" lIns="0" tIns="0" rIns="0" bIns="0" rtlCol="0" anchor="ctr"/>
-          <a:lstStyle/>
-          <a:p>
-            <a:pPr algn="ctr" indent="0" marL="0">
-              <a:buNone/>
-            </a:pPr>
-            <a:r>
-              <a:rPr lang="en-US" sz="550" b="1" dirty="0">
-                <a:solidFill>
-                  <a:srgbClr val="2D3142"/>
-                </a:solidFill>
-                <a:latin typeface="Microsoft YaHei" pitchFamily="34" charset="0"/>
-                <a:ea typeface="Microsoft YaHei" pitchFamily="34" charset="-122"/>
-                <a:cs typeface="Microsoft YaHei" pitchFamily="34" charset="-120"/>
-              </a:rPr>
-              <a:t>review</a:t>
-            </a:r>
-            <a:endParaRPr lang="en-US" sz="550" dirty="0"/>
-          </a:p>
-        </p:txBody>
-      </p:sp>
-      <p:sp>
-        <p:nvSpPr>
-          <p:cNvPr id="75" name="Shape 73"/>
-          <p:cNvSpPr/>
-          <p:nvPr/>
-        </p:nvSpPr>
-        <p:spPr>
-          <a:xfrm>
-            <a:off x="7380468" y="5661028"/>
-            <a:ext cx="481733" cy="192693"/>
-          </a:xfrm>
-          <a:prstGeom prst="ROUNDED_RECTANGLE">
-            <a:avLst>
-              <a:gd name="adj" fmla="val 18981"/>
-            </a:avLst>
-          </a:prstGeom>
-          <a:solidFill>
-            <a:srgbClr val="FDF0E8"/>
-          </a:solidFill>
-          <a:ln w="6350">
-            <a:solidFill>
-              <a:srgbClr val="EB6C36"/>
-            </a:solidFill>
-            <a:prstDash val="solid"/>
-          </a:ln>
-        </p:spPr>
-      </p:sp>
-      <p:sp>
-        <p:nvSpPr>
-          <p:cNvPr id="76" name="Text 74"/>
-          <p:cNvSpPr/>
-          <p:nvPr/>
-        </p:nvSpPr>
-        <p:spPr>
-          <a:xfrm>
-            <a:off x="7380468" y="5661028"/>
-            <a:ext cx="481733" cy="192693"/>
-          </a:xfrm>
-          <a:prstGeom prst="rect">
-            <a:avLst/>
-          </a:prstGeom>
-          <a:noFill/>
-          <a:ln/>
-        </p:spPr>
-        <p:txBody>
-          <a:bodyPr wrap="square" lIns="0" tIns="0" rIns="0" bIns="0" rtlCol="0" anchor="ctr"/>
-          <a:lstStyle/>
-          <a:p>
-            <a:pPr algn="ctr" indent="0" marL="0">
-              <a:buNone/>
-            </a:pPr>
-            <a:r>
-              <a:rPr lang="en-US" sz="550" b="1" dirty="0">
-                <a:solidFill>
-                  <a:srgbClr val="2D3142"/>
-                </a:solidFill>
-                <a:latin typeface="Microsoft YaHei" pitchFamily="34" charset="0"/>
-                <a:ea typeface="Microsoft YaHei" pitchFamily="34" charset="-122"/>
-                <a:cs typeface="Microsoft YaHei" pitchFamily="34" charset="-120"/>
-              </a:rPr>
-              <a:t>publish</a:t>
-            </a:r>
-            <a:endParaRPr lang="en-US" sz="550" dirty="0"/>
-          </a:p>
-        </p:txBody>
-      </p:sp>
-      <p:sp>
-        <p:nvSpPr>
-          <p:cNvPr id="77" name="Shape 75"/>
-          <p:cNvSpPr/>
-          <p:nvPr/>
-        </p:nvSpPr>
-        <p:spPr>
-          <a:xfrm>
-            <a:off x="8825666" y="5661028"/>
-            <a:ext cx="481733" cy="192693"/>
-          </a:xfrm>
-          <a:prstGeom prst="ROUNDED_RECTANGLE">
-            <a:avLst>
-              <a:gd name="adj" fmla="val 18981"/>
-            </a:avLst>
-          </a:prstGeom>
-          <a:solidFill>
-            <a:srgbClr val="FDF0E8"/>
-          </a:solidFill>
-          <a:ln w="6350">
-            <a:solidFill>
-              <a:srgbClr val="EB6C36"/>
-            </a:solidFill>
-            <a:prstDash val="solid"/>
-          </a:ln>
-        </p:spPr>
-      </p:sp>
-      <p:sp>
-        <p:nvSpPr>
-          <p:cNvPr id="78" name="Text 76"/>
-          <p:cNvSpPr/>
-          <p:nvPr/>
-        </p:nvSpPr>
-        <p:spPr>
-          <a:xfrm>
-            <a:off x="8825666" y="5661028"/>
-            <a:ext cx="481733" cy="192693"/>
-          </a:xfrm>
-          <a:prstGeom prst="rect">
-            <a:avLst/>
-          </a:prstGeom>
-          <a:noFill/>
-          <a:ln/>
-        </p:spPr>
-        <p:txBody>
-          <a:bodyPr wrap="square" lIns="0" tIns="0" rIns="0" bIns="0" rtlCol="0" anchor="ctr"/>
-          <a:lstStyle/>
-          <a:p>
-            <a:pPr algn="ctr" indent="0" marL="0">
-              <a:buNone/>
-            </a:pPr>
-            <a:r>
-              <a:rPr lang="en-US" sz="550" b="1" dirty="0">
-                <a:solidFill>
-                  <a:srgbClr val="2D3142"/>
-                </a:solidFill>
-                <a:latin typeface="Microsoft YaHei" pitchFamily="34" charset="0"/>
-                <a:ea typeface="Microsoft YaHei" pitchFamily="34" charset="-122"/>
-                <a:cs typeface="Microsoft YaHei" pitchFamily="34" charset="-120"/>
-              </a:rPr>
-              <a:t>project</a:t>
-            </a:r>
-            <a:endParaRPr lang="en-US" sz="550" dirty="0"/>
-          </a:p>
-        </p:txBody>
-      </p:sp>
-      <p:sp>
-        <p:nvSpPr>
-          <p:cNvPr id="79" name="Shape 77"/>
-          <p:cNvSpPr/>
-          <p:nvPr/>
-        </p:nvSpPr>
-        <p:spPr>
-          <a:xfrm>
-            <a:off x="10270864" y="5661028"/>
-            <a:ext cx="481733" cy="192693"/>
-          </a:xfrm>
-          <a:prstGeom prst="ROUNDED_RECTANGLE">
-            <a:avLst>
-              <a:gd name="adj" fmla="val 18981"/>
-            </a:avLst>
-          </a:prstGeom>
-          <a:solidFill>
-            <a:srgbClr val="F0F1F3"/>
-          </a:solidFill>
-          <a:ln w="6350">
-            <a:solidFill>
-              <a:srgbClr val="7A8399"/>
-            </a:solidFill>
-            <a:prstDash val="solid"/>
-          </a:ln>
-        </p:spPr>
-      </p:sp>
-      <p:sp>
-        <p:nvSpPr>
-          <p:cNvPr id="80" name="Text 78"/>
-          <p:cNvSpPr/>
-          <p:nvPr/>
-        </p:nvSpPr>
-        <p:spPr>
-          <a:xfrm>
-            <a:off x="10270864" y="5661028"/>
-            <a:ext cx="481733" cy="192693"/>
-          </a:xfrm>
-          <a:prstGeom prst="rect">
-            <a:avLst/>
-          </a:prstGeom>
-          <a:noFill/>
-          <a:ln/>
-        </p:spPr>
-        <p:txBody>
-          <a:bodyPr wrap="square" lIns="0" tIns="0" rIns="0" bIns="0" rtlCol="0" anchor="ctr"/>
-          <a:lstStyle/>
-          <a:p>
-            <a:pPr algn="ctr" indent="0" marL="0">
-              <a:buNone/>
-            </a:pPr>
-            <a:r>
-              <a:rPr lang="en-US" sz="550" b="1" dirty="0">
-                <a:solidFill>
-                  <a:srgbClr val="2D3142"/>
-                </a:solidFill>
-                <a:latin typeface="Microsoft YaHei" pitchFamily="34" charset="0"/>
-                <a:ea typeface="Microsoft YaHei" pitchFamily="34" charset="-122"/>
-                <a:cs typeface="Microsoft YaHei" pitchFamily="34" charset="-120"/>
-              </a:rPr>
-              <a:t>serve</a:t>
-            </a:r>
-            <a:endParaRPr lang="en-US" sz="550" dirty="0"/>
-          </a:p>
-        </p:txBody>
-      </p:sp>
-      <p:sp>
-        <p:nvSpPr>
-          <p:cNvPr id="81" name="Shape 79"/>
-          <p:cNvSpPr/>
-          <p:nvPr/>
-        </p:nvSpPr>
-        <p:spPr>
-          <a:xfrm>
-            <a:off x="2081409" y="5757375"/>
-            <a:ext cx="963465" cy="0"/>
-          </a:xfrm>
-          <a:prstGeom prst="LINE">
-            <a:avLst/>
-          </a:prstGeom>
-          <a:noFill/>
-          <a:ln w="9525">
-            <a:solidFill>
-              <a:srgbClr val="EB6C36"/>
-            </a:solidFill>
-            <a:prstDash val="solid"/>
-            <a:tailEnd type="triangle"/>
-          </a:ln>
-        </p:spPr>
-      </p:sp>
-      <p:sp>
-        <p:nvSpPr>
-          <p:cNvPr id="82" name="Shape 80"/>
-          <p:cNvSpPr/>
-          <p:nvPr/>
-        </p:nvSpPr>
-        <p:spPr>
-          <a:xfrm>
-            <a:off x="3526607" y="5757375"/>
-            <a:ext cx="963465" cy="0"/>
-          </a:xfrm>
-          <a:prstGeom prst="LINE">
-            <a:avLst/>
-          </a:prstGeom>
-          <a:noFill/>
-          <a:ln w="9525">
-            <a:solidFill>
-              <a:srgbClr val="EB6C36"/>
-            </a:solidFill>
-            <a:prstDash val="solid"/>
-            <a:tailEnd type="triangle"/>
-          </a:ln>
-        </p:spPr>
-      </p:sp>
-      <p:sp>
-        <p:nvSpPr>
-          <p:cNvPr id="83" name="Shape 81"/>
-          <p:cNvSpPr/>
-          <p:nvPr/>
-        </p:nvSpPr>
-        <p:spPr>
-          <a:xfrm>
-            <a:off x="4971805" y="5757375"/>
-            <a:ext cx="963465" cy="0"/>
-          </a:xfrm>
-          <a:prstGeom prst="LINE">
-            <a:avLst/>
-          </a:prstGeom>
-          <a:noFill/>
-          <a:ln w="9525">
-            <a:solidFill>
-              <a:srgbClr val="EB6C36"/>
-            </a:solidFill>
-            <a:prstDash val="solid"/>
-            <a:tailEnd type="triangle"/>
-          </a:ln>
-        </p:spPr>
-      </p:sp>
-      <p:sp>
-        <p:nvSpPr>
-          <p:cNvPr id="84" name="Shape 82"/>
-          <p:cNvSpPr/>
-          <p:nvPr/>
-        </p:nvSpPr>
-        <p:spPr>
-          <a:xfrm>
-            <a:off x="6417003" y="5757375"/>
-            <a:ext cx="963465" cy="0"/>
-          </a:xfrm>
-          <a:prstGeom prst="LINE">
-            <a:avLst/>
-          </a:prstGeom>
-          <a:noFill/>
-          <a:ln w="9525">
-            <a:solidFill>
-              <a:srgbClr val="EB6C36"/>
-            </a:solidFill>
-            <a:prstDash val="solid"/>
-            <a:tailEnd type="triangle"/>
-          </a:ln>
-        </p:spPr>
-      </p:sp>
-      <p:sp>
-        <p:nvSpPr>
-          <p:cNvPr id="85" name="Shape 83"/>
-          <p:cNvSpPr/>
-          <p:nvPr/>
-        </p:nvSpPr>
-        <p:spPr>
-          <a:xfrm>
-            <a:off x="7862201" y="5757375"/>
-            <a:ext cx="963465" cy="0"/>
-          </a:xfrm>
-          <a:prstGeom prst="LINE">
-            <a:avLst/>
-          </a:prstGeom>
-          <a:noFill/>
-          <a:ln w="9525">
-            <a:solidFill>
-              <a:srgbClr val="EB6C36"/>
-            </a:solidFill>
-            <a:prstDash val="solid"/>
-            <a:tailEnd type="triangle"/>
-          </a:ln>
-        </p:spPr>
-      </p:sp>
-      <p:sp>
-        <p:nvSpPr>
-          <p:cNvPr id="86" name="Shape 84"/>
-          <p:cNvSpPr/>
-          <p:nvPr/>
-        </p:nvSpPr>
-        <p:spPr>
-          <a:xfrm>
-            <a:off x="9307399" y="5757375"/>
-            <a:ext cx="963465" cy="0"/>
-          </a:xfrm>
-          <a:prstGeom prst="LINE">
-            <a:avLst/>
-          </a:prstGeom>
-          <a:noFill/>
-          <a:ln w="9525">
-            <a:solidFill>
-              <a:srgbClr val="EB6C36"/>
-            </a:solidFill>
-            <a:prstDash val="solid"/>
-            <a:tailEnd type="triangle"/>
-          </a:ln>
-        </p:spPr>
-      </p:sp>
-      <p:sp>
-        <p:nvSpPr>
-          <p:cNvPr id="87" name="Shape 85"/>
-          <p:cNvSpPr/>
-          <p:nvPr/>
-        </p:nvSpPr>
-        <p:spPr>
-          <a:xfrm>
-            <a:off x="2282131" y="779470"/>
-            <a:ext cx="0" cy="417502"/>
-          </a:xfrm>
-          <a:prstGeom prst="LINE">
-            <a:avLst/>
-          </a:prstGeom>
-          <a:noFill/>
-          <a:ln w="8890">
-            <a:solidFill>
-              <a:srgbClr val="2E5AA8"/>
-            </a:solidFill>
-            <a:prstDash val="solid"/>
-            <a:tailEnd type="triangle"/>
-          </a:ln>
-        </p:spPr>
-      </p:sp>
-      <p:sp>
-        <p:nvSpPr>
-          <p:cNvPr id="88" name="Shape 86"/>
-          <p:cNvSpPr/>
-          <p:nvPr/>
-        </p:nvSpPr>
-        <p:spPr>
-          <a:xfrm>
-            <a:off x="3703242" y="779470"/>
-            <a:ext cx="0" cy="417502"/>
-          </a:xfrm>
-          <a:prstGeom prst="LINE">
-            <a:avLst/>
-          </a:prstGeom>
-          <a:noFill/>
-          <a:ln w="8890">
-            <a:solidFill>
-              <a:srgbClr val="2E5AA8"/>
-            </a:solidFill>
-            <a:prstDash val="solid"/>
-            <a:tailEnd type="triangle"/>
-          </a:ln>
-        </p:spPr>
-      </p:sp>
-      <p:sp>
-        <p:nvSpPr>
-          <p:cNvPr id="89" name="Shape 87"/>
-          <p:cNvSpPr/>
-          <p:nvPr/>
-        </p:nvSpPr>
-        <p:spPr>
-          <a:xfrm>
-            <a:off x="2362419" y="1646589"/>
-            <a:ext cx="0" cy="176635"/>
-          </a:xfrm>
-          <a:prstGeom prst="LINE">
-            <a:avLst/>
-          </a:prstGeom>
-          <a:noFill/>
-          <a:ln w="10160">
-            <a:solidFill>
-              <a:srgbClr val="EB6C36"/>
-            </a:solidFill>
-            <a:prstDash val="solid"/>
-            <a:tailEnd type="triangle"/>
-          </a:ln>
-        </p:spPr>
-      </p:sp>
-      <p:sp>
-        <p:nvSpPr>
-          <p:cNvPr id="90" name="Shape 88"/>
-          <p:cNvSpPr/>
-          <p:nvPr/>
-        </p:nvSpPr>
-        <p:spPr>
-          <a:xfrm>
-            <a:off x="2362419" y="1823224"/>
-            <a:ext cx="-120433" cy="112404"/>
-          </a:xfrm>
-          <a:prstGeom prst="LINE">
-            <a:avLst/>
-          </a:prstGeom>
-          <a:noFill/>
-          <a:ln w="10160">
-            <a:solidFill>
-              <a:srgbClr val="EB6C36"/>
-            </a:solidFill>
-            <a:prstDash val="solid"/>
-            <a:tailEnd type="triangle"/>
-          </a:ln>
-        </p:spPr>
-      </p:sp>
-      <p:sp>
-        <p:nvSpPr>
-          <p:cNvPr id="91" name="Shape 89"/>
-          <p:cNvSpPr/>
-          <p:nvPr/>
-        </p:nvSpPr>
-        <p:spPr>
-          <a:xfrm>
-            <a:off x="4144830" y="1646589"/>
-            <a:ext cx="0" cy="176635"/>
-          </a:xfrm>
-          <a:prstGeom prst="LINE">
-            <a:avLst/>
-          </a:prstGeom>
-          <a:noFill/>
-          <a:ln w="10160">
-            <a:solidFill>
-              <a:srgbClr val="EB6C36"/>
-            </a:solidFill>
-            <a:prstDash val="solid"/>
-            <a:tailEnd type="triangle"/>
-          </a:ln>
-        </p:spPr>
-      </p:sp>
-      <p:sp>
-        <p:nvSpPr>
-          <p:cNvPr id="92" name="Shape 90"/>
-          <p:cNvSpPr/>
-          <p:nvPr/>
-        </p:nvSpPr>
-        <p:spPr>
-          <a:xfrm>
-            <a:off x="4144830" y="1823224"/>
-            <a:ext cx="-441588" cy="112404"/>
-          </a:xfrm>
-          <a:prstGeom prst="LINE">
-            <a:avLst/>
-          </a:prstGeom>
-          <a:noFill/>
-          <a:ln w="10160">
-            <a:solidFill>
-              <a:srgbClr val="EB6C36"/>
-            </a:solidFill>
-            <a:prstDash val="solid"/>
-            <a:tailEnd type="triangle"/>
-          </a:ln>
-        </p:spPr>
-      </p:sp>
-      <p:sp>
-        <p:nvSpPr>
-          <p:cNvPr id="93" name="Shape 91"/>
-          <p:cNvSpPr/>
-          <p:nvPr/>
-        </p:nvSpPr>
-        <p:spPr>
-          <a:xfrm>
-            <a:off x="5846952" y="1646589"/>
-            <a:ext cx="0" cy="176635"/>
-          </a:xfrm>
-          <a:prstGeom prst="LINE">
-            <a:avLst/>
-          </a:prstGeom>
-          <a:noFill/>
-          <a:ln w="7620">
-            <a:solidFill>
-              <a:srgbClr val="4F5D75"/>
-            </a:solidFill>
-            <a:prstDash val="solid"/>
-            <a:tailEnd type="triangle"/>
-          </a:ln>
-        </p:spPr>
-      </p:sp>
-      <p:sp>
-        <p:nvSpPr>
-          <p:cNvPr id="94" name="Shape 92"/>
-          <p:cNvSpPr/>
-          <p:nvPr/>
-        </p:nvSpPr>
-        <p:spPr>
-          <a:xfrm>
-            <a:off x="5846952" y="1823224"/>
-            <a:ext cx="1083899" cy="112404"/>
-          </a:xfrm>
-          <a:prstGeom prst="LINE">
-            <a:avLst/>
-          </a:prstGeom>
-          <a:noFill/>
-          <a:ln w="7620">
-            <a:solidFill>
-              <a:srgbClr val="4F5D75"/>
-            </a:solidFill>
-            <a:prstDash val="solid"/>
-            <a:tailEnd type="triangle"/>
-          </a:ln>
-        </p:spPr>
-      </p:sp>
-      <p:sp>
-        <p:nvSpPr>
-          <p:cNvPr id="95" name="Shape 93"/>
-          <p:cNvSpPr/>
-          <p:nvPr/>
-        </p:nvSpPr>
-        <p:spPr>
-          <a:xfrm>
-            <a:off x="7268064" y="1646589"/>
-            <a:ext cx="0" cy="176635"/>
-          </a:xfrm>
-          <a:prstGeom prst="LINE">
-            <a:avLst/>
-          </a:prstGeom>
-          <a:noFill/>
-          <a:ln w="7620">
-            <a:solidFill>
-              <a:srgbClr val="4F5D75"/>
-            </a:solidFill>
-            <a:prstDash val="solid"/>
-            <a:tailEnd type="triangle"/>
-          </a:ln>
-        </p:spPr>
-      </p:sp>
-      <p:sp>
-        <p:nvSpPr>
-          <p:cNvPr id="96" name="Shape 94"/>
-          <p:cNvSpPr/>
-          <p:nvPr/>
-        </p:nvSpPr>
-        <p:spPr>
-          <a:xfrm>
-            <a:off x="7268064" y="1823224"/>
-            <a:ext cx="1140101" cy="112404"/>
-          </a:xfrm>
-          <a:prstGeom prst="LINE">
-            <a:avLst/>
-          </a:prstGeom>
-          <a:noFill/>
-          <a:ln w="7620">
-            <a:solidFill>
-              <a:srgbClr val="4F5D75"/>
-            </a:solidFill>
-            <a:prstDash val="solid"/>
-            <a:tailEnd type="triangle"/>
-          </a:ln>
-        </p:spPr>
-      </p:sp>
-      <p:sp>
-        <p:nvSpPr>
-          <p:cNvPr id="97" name="Shape 95"/>
-          <p:cNvSpPr/>
-          <p:nvPr/>
-        </p:nvSpPr>
-        <p:spPr>
-          <a:xfrm>
-            <a:off x="2241986" y="4183715"/>
-            <a:ext cx="0" cy="96347"/>
-          </a:xfrm>
-          <a:prstGeom prst="LINE">
-            <a:avLst/>
-          </a:prstGeom>
-          <a:noFill/>
-          <a:ln w="7620">
-            <a:solidFill>
-              <a:srgbClr val="EB6C36"/>
-            </a:solidFill>
-            <a:prstDash val="dash"/>
-            <a:tailEnd type="triangle"/>
-          </a:ln>
-        </p:spPr>
-      </p:sp>
-      <p:sp>
-        <p:nvSpPr>
-          <p:cNvPr id="98" name="Shape 96"/>
-          <p:cNvSpPr/>
-          <p:nvPr/>
-        </p:nvSpPr>
-        <p:spPr>
-          <a:xfrm>
-            <a:off x="2241986" y="4280061"/>
-            <a:ext cx="2336404" cy="96347"/>
-          </a:xfrm>
-          <a:prstGeom prst="LINE">
-            <a:avLst/>
-          </a:prstGeom>
-          <a:noFill/>
-          <a:ln w="7620">
-            <a:solidFill>
-              <a:srgbClr val="EB6C36"/>
-            </a:solidFill>
-            <a:prstDash val="dash"/>
-            <a:tailEnd type="triangle"/>
-          </a:ln>
-        </p:spPr>
-      </p:sp>
-      <p:sp>
-        <p:nvSpPr>
-          <p:cNvPr id="99" name="Shape 97"/>
-          <p:cNvSpPr/>
-          <p:nvPr/>
-        </p:nvSpPr>
-        <p:spPr>
-          <a:xfrm>
-            <a:off x="3703242" y="4183715"/>
-            <a:ext cx="0" cy="96347"/>
-          </a:xfrm>
-          <a:prstGeom prst="LINE">
-            <a:avLst/>
-          </a:prstGeom>
-          <a:noFill/>
-          <a:ln w="7620">
-            <a:solidFill>
-              <a:srgbClr val="EB6C36"/>
-            </a:solidFill>
-            <a:prstDash val="dash"/>
-            <a:tailEnd type="triangle"/>
-          </a:ln>
-        </p:spPr>
-      </p:sp>
-      <p:sp>
-        <p:nvSpPr>
-          <p:cNvPr id="100" name="Shape 98"/>
-          <p:cNvSpPr/>
-          <p:nvPr/>
-        </p:nvSpPr>
-        <p:spPr>
-          <a:xfrm>
-            <a:off x="3703242" y="4280061"/>
-            <a:ext cx="875148" cy="96347"/>
-          </a:xfrm>
-          <a:prstGeom prst="LINE">
-            <a:avLst/>
-          </a:prstGeom>
-          <a:noFill/>
-          <a:ln w="7620">
-            <a:solidFill>
-              <a:srgbClr val="EB6C36"/>
-            </a:solidFill>
-            <a:prstDash val="dash"/>
-            <a:tailEnd type="triangle"/>
-          </a:ln>
-        </p:spPr>
-      </p:sp>
-      <p:sp>
-        <p:nvSpPr>
-          <p:cNvPr id="101" name="Shape 99"/>
-          <p:cNvSpPr/>
-          <p:nvPr/>
-        </p:nvSpPr>
-        <p:spPr>
-          <a:xfrm>
-            <a:off x="6930851" y="4183715"/>
-            <a:ext cx="0" cy="96347"/>
-          </a:xfrm>
-          <a:prstGeom prst="LINE">
-            <a:avLst/>
-          </a:prstGeom>
-          <a:noFill/>
-          <a:ln w="6350">
-            <a:solidFill>
-              <a:srgbClr val="4F5D75"/>
-            </a:solidFill>
-            <a:prstDash val="dash"/>
-            <a:tailEnd type="triangle"/>
-          </a:ln>
-        </p:spPr>
-      </p:sp>
-      <p:sp>
-        <p:nvSpPr>
-          <p:cNvPr id="102" name="Shape 100"/>
-          <p:cNvSpPr/>
-          <p:nvPr/>
-        </p:nvSpPr>
-        <p:spPr>
-          <a:xfrm>
-            <a:off x="6930851" y="4280061"/>
-            <a:ext cx="-1083899" cy="96347"/>
-          </a:xfrm>
-          <a:prstGeom prst="LINE">
-            <a:avLst/>
-          </a:prstGeom>
-          <a:noFill/>
-          <a:ln w="6350">
-            <a:solidFill>
-              <a:srgbClr val="4F5D75"/>
-            </a:solidFill>
-            <a:prstDash val="dash"/>
-            <a:tailEnd type="triangle"/>
-          </a:ln>
-        </p:spPr>
-      </p:sp>
-      <p:sp>
-        <p:nvSpPr>
-          <p:cNvPr id="103" name="Shape 101"/>
-          <p:cNvSpPr/>
-          <p:nvPr/>
-        </p:nvSpPr>
-        <p:spPr>
-          <a:xfrm>
-            <a:off x="8408164" y="4183715"/>
-            <a:ext cx="0" cy="96347"/>
-          </a:xfrm>
-          <a:prstGeom prst="LINE">
-            <a:avLst/>
-          </a:prstGeom>
-          <a:noFill/>
-          <a:ln w="6350">
-            <a:solidFill>
-              <a:srgbClr val="4F5D75"/>
-            </a:solidFill>
-            <a:prstDash val="dash"/>
-            <a:tailEnd type="triangle"/>
-          </a:ln>
-        </p:spPr>
-      </p:sp>
-      <p:sp>
-        <p:nvSpPr>
-          <p:cNvPr id="104" name="Shape 102"/>
-          <p:cNvSpPr/>
-          <p:nvPr/>
-        </p:nvSpPr>
-        <p:spPr>
-          <a:xfrm>
-            <a:off x="8408164" y="4280061"/>
-            <a:ext cx="-2561212" cy="96347"/>
-          </a:xfrm>
-          <a:prstGeom prst="LINE">
-            <a:avLst/>
-          </a:prstGeom>
-          <a:noFill/>
-          <a:ln w="6350">
-            <a:solidFill>
-              <a:srgbClr val="4F5D75"/>
-            </a:solidFill>
-            <a:prstDash val="dash"/>
-            <a:tailEnd type="triangle"/>
-          </a:ln>
-        </p:spPr>
-      </p:sp>
-      <p:sp>
-        <p:nvSpPr>
-          <p:cNvPr id="105" name="Shape 103"/>
-          <p:cNvSpPr/>
-          <p:nvPr/>
-        </p:nvSpPr>
-        <p:spPr>
-          <a:xfrm>
-            <a:off x="1599676" y="6407714"/>
-            <a:ext cx="224809" cy="0"/>
-          </a:xfrm>
-          <a:prstGeom prst="LINE">
-            <a:avLst/>
-          </a:prstGeom>
-          <a:noFill/>
-          <a:ln w="9525">
-            <a:solidFill>
-              <a:srgbClr val="EB6C36"/>
-            </a:solidFill>
-            <a:prstDash val="solid"/>
-            <a:tailEnd type="triangle"/>
-          </a:ln>
-        </p:spPr>
-      </p:sp>
-      <p:sp>
-        <p:nvSpPr>
-          <p:cNvPr id="106" name="Text 104"/>
-          <p:cNvSpPr/>
-          <p:nvPr/>
-        </p:nvSpPr>
-        <p:spPr>
-          <a:xfrm>
-            <a:off x="1888716" y="6359540"/>
-            <a:ext cx="401444" cy="112404"/>
-          </a:xfrm>
-          <a:prstGeom prst="rect">
-            <a:avLst/>
-          </a:prstGeom>
-          <a:noFill/>
-          <a:ln/>
-        </p:spPr>
-        <p:txBody>
-          <a:bodyPr wrap="square" lIns="0" tIns="0" rIns="0" bIns="0" rtlCol="0" anchor="ctr"/>
-          <a:lstStyle/>
-          <a:p>
-            <a:pPr algn="l" indent="0" marL="0">
-              <a:buNone/>
-            </a:pPr>
-            <a:r>
-              <a:rPr lang="en-US" sz="550" dirty="0">
-                <a:solidFill>
-                  <a:srgbClr val="4F5D75"/>
-                </a:solidFill>
-                <a:latin typeface="Microsoft YaHei" pitchFamily="34" charset="0"/>
-                <a:ea typeface="Microsoft YaHei" pitchFamily="34" charset="-122"/>
-                <a:cs typeface="Microsoft YaHei" pitchFamily="34" charset="-120"/>
-              </a:rPr>
-              <a:t>主数据流</a:t>
-            </a:r>
-            <a:endParaRPr lang="en-US" sz="550" dirty="0"/>
-          </a:p>
-        </p:txBody>
-      </p:sp>
-      <p:sp>
-        <p:nvSpPr>
-          <p:cNvPr id="107" name="Shape 105"/>
-          <p:cNvSpPr/>
-          <p:nvPr/>
-        </p:nvSpPr>
-        <p:spPr>
-          <a:xfrm>
-            <a:off x="2402564" y="6407714"/>
-            <a:ext cx="224809" cy="0"/>
-          </a:xfrm>
-          <a:prstGeom prst="LINE">
-            <a:avLst/>
-          </a:prstGeom>
-          <a:noFill/>
-          <a:ln w="7620">
-            <a:solidFill>
-              <a:srgbClr val="4F5D75"/>
-            </a:solidFill>
-            <a:prstDash val="dash"/>
-            <a:tailEnd type="triangle"/>
-          </a:ln>
-        </p:spPr>
-      </p:sp>
-      <p:sp>
-        <p:nvSpPr>
-          <p:cNvPr id="108" name="Text 106"/>
-          <p:cNvSpPr/>
-          <p:nvPr/>
-        </p:nvSpPr>
-        <p:spPr>
-          <a:xfrm>
-            <a:off x="2691603" y="6359540"/>
-            <a:ext cx="481733" cy="112404"/>
-          </a:xfrm>
-          <a:prstGeom prst="rect">
-            <a:avLst/>
-          </a:prstGeom>
-          <a:noFill/>
-          <a:ln/>
-        </p:spPr>
-        <p:txBody>
-          <a:bodyPr wrap="square" lIns="0" tIns="0" rIns="0" bIns="0" rtlCol="0" anchor="ctr"/>
-          <a:lstStyle/>
-          <a:p>
-            <a:pPr algn="l" indent="0" marL="0">
-              <a:buNone/>
-            </a:pPr>
-            <a:r>
-              <a:rPr lang="en-US" sz="550" dirty="0">
-                <a:solidFill>
-                  <a:srgbClr val="4F5D75"/>
-                </a:solidFill>
-                <a:latin typeface="Microsoft YaHei" pitchFamily="34" charset="0"/>
-                <a:ea typeface="Microsoft YaHei" pitchFamily="34" charset="-122"/>
-                <a:cs typeface="Microsoft YaHei" pitchFamily="34" charset="-120"/>
-              </a:rPr>
-              <a:t>数据源映射</a:t>
-            </a:r>
-            <a:endParaRPr lang="en-US" sz="550" dirty="0"/>
-          </a:p>
-        </p:txBody>
-      </p:sp>
-      <p:sp>
-        <p:nvSpPr>
-          <p:cNvPr id="109" name="Shape 107"/>
-          <p:cNvSpPr/>
-          <p:nvPr/>
-        </p:nvSpPr>
-        <p:spPr>
-          <a:xfrm>
-            <a:off x="3366029" y="6407714"/>
-            <a:ext cx="224809" cy="0"/>
-          </a:xfrm>
-          <a:prstGeom prst="LINE">
-            <a:avLst/>
-          </a:prstGeom>
-          <a:noFill/>
-          <a:ln w="8890">
-            <a:solidFill>
-              <a:srgbClr val="2E5AA8"/>
-            </a:solidFill>
-            <a:prstDash val="solid"/>
-            <a:tailEnd type="triangle"/>
-          </a:ln>
-        </p:spPr>
-      </p:sp>
-      <p:sp>
-        <p:nvSpPr>
-          <p:cNvPr id="110" name="Text 108"/>
-          <p:cNvSpPr/>
-          <p:nvPr/>
-        </p:nvSpPr>
-        <p:spPr>
-          <a:xfrm>
-            <a:off x="3655069" y="6359540"/>
-            <a:ext cx="401444" cy="112404"/>
-          </a:xfrm>
-          <a:prstGeom prst="rect">
-            <a:avLst/>
-          </a:prstGeom>
-          <a:noFill/>
-          <a:ln/>
-        </p:spPr>
-        <p:txBody>
-          <a:bodyPr wrap="square" lIns="0" tIns="0" rIns="0" bIns="0" rtlCol="0" anchor="ctr"/>
-          <a:lstStyle/>
-          <a:p>
-            <a:pPr algn="l" indent="0" marL="0">
-              <a:buNone/>
-            </a:pPr>
-            <a:r>
-              <a:rPr lang="en-US" sz="550" dirty="0">
-                <a:solidFill>
-                  <a:srgbClr val="4F5D75"/>
-                </a:solidFill>
-                <a:latin typeface="Microsoft YaHei" pitchFamily="34" charset="0"/>
-                <a:ea typeface="Microsoft YaHei" pitchFamily="34" charset="-122"/>
-                <a:cs typeface="Microsoft YaHei" pitchFamily="34" charset="-120"/>
-              </a:rPr>
-              <a:t>HTTP 请求</a:t>
-            </a:r>
-            <a:endParaRPr lang="en-US" sz="550" dirty="0"/>
-          </a:p>
-        </p:txBody>
-      </p:sp>
-      <p:sp>
-        <p:nvSpPr>
-          <p:cNvPr id="111" name="Shape 109"/>
-          <p:cNvSpPr/>
-          <p:nvPr/>
-        </p:nvSpPr>
-        <p:spPr>
-          <a:xfrm>
-            <a:off x="1471214" y="6560262"/>
-            <a:ext cx="9249268" cy="128462"/>
-          </a:xfrm>
-          <a:prstGeom prst="ROUNDED_RECTANGLE">
-            <a:avLst>
-              <a:gd name="adj" fmla="val 28472"/>
-            </a:avLst>
-          </a:prstGeom>
-          <a:solidFill>
-            <a:srgbClr val="FDF0E8"/>
-          </a:solidFill>
-          <a:ln w="3810">
-            <a:solidFill>
-              <a:srgbClr val="EB6C36"/>
-            </a:solidFill>
-            <a:prstDash val="solid"/>
-          </a:ln>
-        </p:spPr>
-      </p:sp>
-      <p:sp>
-        <p:nvSpPr>
-          <p:cNvPr id="112" name="Text 110"/>
-          <p:cNvSpPr/>
-          <p:nvPr/>
-        </p:nvSpPr>
-        <p:spPr>
-          <a:xfrm>
-            <a:off x="1471214" y="6560262"/>
-            <a:ext cx="9249268" cy="128462"/>
-          </a:xfrm>
-          <a:prstGeom prst="rect">
-            <a:avLst/>
-          </a:prstGeom>
-          <a:noFill/>
-          <a:ln/>
-        </p:spPr>
-        <p:txBody>
-          <a:bodyPr wrap="square" lIns="0" tIns="0" rIns="0" bIns="0" rtlCol="0" anchor="ctr"/>
-          <a:lstStyle/>
-          <a:p>
-            <a:pPr algn="ctr" indent="0" marL="0">
-              <a:buNone/>
-            </a:pPr>
-            <a:r>
-              <a:rPr lang="en-US" sz="500" dirty="0">
-                <a:solidFill>
-                  <a:srgbClr val="4F5D75"/>
-                </a:solidFill>
-                <a:latin typeface="Consolas" pitchFamily="34" charset="0"/>
-                <a:ea typeface="Consolas" pitchFamily="34" charset="-122"/>
-                <a:cs typeface="Consolas" pitchFamily="34" charset="-120"/>
-              </a:rPr>
-              <a:t>知识地图→用什么  知识目录→怎么找  知识资产→是什么  工作空间→放哪里  生命周期→怎么流转</a:t>
-            </a:r>
-            <a:endParaRPr lang="en-US" sz="500" dirty="0"/>
-          </a:p>
-        </p:txBody>
-      </p:sp>
-    </p:spTree>
-  </p:cSld>
-  <p:clrMapOvr>
-    <a:masterClrMapping/>
-  </p:clrMapOvr>
-</p:sld>
 </file>
 
 <file path=ppt/slides/slide3.xml><?xml version="1.0" encoding="utf-8"?>
